--- a/DRDO_EW_Smart_Scan_Presentation.pptx
+++ b/DRDO_EW_Smart_Scan_Presentation.pptx
@@ -12,7 +12,7 @@
     <p:sldId id="260" r:id="rId11"/>
     <p:sldId id="261" r:id="rId12"/>
   </p:sldIdLst>
-  <p:sldSz cx="12191695" cy="6858000" type="screen4x3"/>
+  <p:sldSz cx="12191999" cy="6858000" type="screen4x3"/>
   <p:notesSz cx="6858000" cy="9144000"/>
   <p:defaultTextStyle>
     <a:defPPr>
@@ -3093,94 +3093,46 @@
         <p:nvPr/>
       </p:nvGrpSpPr>
       <p:grpSpPr/>
-      <p:sp>
-        <p:nvSpPr>
-          <p:cNvPr id="2" name="TextBox 1"/>
-          <p:cNvSpPr txBox="1"/>
+      <p:pic>
+        <p:nvPicPr>
+          <p:cNvPr id="2" name="Picture 1" descr="sih_logo_clean.png"/>
+          <p:cNvPicPr>
+            <a:picLocks noChangeAspect="1"/>
+          </p:cNvPicPr>
           <p:nvPr/>
-        </p:nvSpPr>
-        <p:spPr>
-          <a:xfrm>
-            <a:off x="731520" y="228600"/>
-            <a:ext cx="7315200" cy="365760"/>
+        </p:nvPicPr>
+        <p:blipFill>
+          <a:blip r:embed="rId2"/>
+          <a:stretch>
+            <a:fillRect/>
+          </a:stretch>
+        </p:blipFill>
+        <p:spPr>
+          <a:xfrm>
+            <a:off x="9821333" y="127000"/>
+            <a:ext cx="2116666" cy="914400"/>
           </a:xfrm>
           <a:prstGeom prst="rect">
             <a:avLst/>
           </a:prstGeom>
-          <a:noFill/>
-        </p:spPr>
-        <p:txBody>
-          <a:bodyPr wrap="square">
-            <a:spAutoFit/>
-          </a:bodyPr>
-          <a:lstStyle/>
-          <a:p>
-            <a:pPr>
-              <a:defRPr sz="1400" b="1">
-                <a:solidFill>
-                  <a:srgbClr val="102C57"/>
-                </a:solidFill>
-                <a:latin typeface="Georgia"/>
-              </a:defRPr>
-            </a:pPr>
-            <a:r>
-              <a:t>SMART INDIA HACKATHON 2026</a:t>
-            </a:r>
-          </a:p>
-        </p:txBody>
-      </p:sp>
-      <p:sp>
-        <p:nvSpPr>
-          <p:cNvPr id="3" name="TextBox 2"/>
-          <p:cNvSpPr txBox="1"/>
-          <p:nvPr/>
-        </p:nvSpPr>
-        <p:spPr>
-          <a:xfrm>
-            <a:off x="9601200" y="182880"/>
-            <a:ext cx="2011680" cy="457200"/>
-          </a:xfrm>
-          <a:prstGeom prst="rect">
-            <a:avLst/>
-          </a:prstGeom>
-          <a:noFill/>
-        </p:spPr>
-        <p:txBody>
-          <a:bodyPr wrap="none">
-            <a:spAutoFit/>
-          </a:bodyPr>
-          <a:lstStyle/>
-          <a:p>
-            <a:pPr algn="r">
-              <a:defRPr sz="1100" b="1">
-                <a:solidFill>
-                  <a:srgbClr val="1B56AC"/>
-                </a:solidFill>
-                <a:latin typeface="Arial"/>
-              </a:defRPr>
-            </a:pPr>
-            <a:r>
-              <a:t>SIH 2026 // DRDO</a:t>
-            </a:r>
-          </a:p>
-        </p:txBody>
-      </p:sp>
-      <p:sp>
-        <p:nvSpPr>
-          <p:cNvPr id="4" name="Rectangle 3"/>
+        </p:spPr>
+      </p:pic>
+      <p:sp>
+        <p:nvSpPr>
+          <p:cNvPr id="3" name="Rectangle 2"/>
           <p:cNvSpPr/>
           <p:nvPr/>
         </p:nvSpPr>
         <p:spPr>
           <a:xfrm>
-            <a:off x="0" y="6492240"/>
-            <a:ext cx="12191695" cy="365760"/>
+            <a:off x="0" y="6299200"/>
+            <a:ext cx="12192000" cy="558800"/>
           </a:xfrm>
           <a:prstGeom prst="rect">
             <a:avLst/>
           </a:prstGeom>
           <a:solidFill>
-            <a:srgbClr val="102C57"/>
+            <a:srgbClr val="0B5394"/>
           </a:solidFill>
           <a:ln>
             <a:noFill/>
@@ -3204,30 +3156,20 @@
           <a:bodyPr rtlCol="0" anchor="ctr"/>
           <a:lstStyle/>
           <a:p>
-            <a:pPr algn="ctr">
-              <a:defRPr sz="1000">
-                <a:solidFill>
-                  <a:srgbClr val="FFFFFF"/>
-                </a:solidFill>
-                <a:latin typeface="Arial"/>
-              </a:defRPr>
-            </a:pPr>
-            <a:r>
-              <a:t>SMART INDIA HACKATHON 2026</a:t>
-            </a:r>
-          </a:p>
-        </p:txBody>
-      </p:sp>
-      <p:sp>
-        <p:nvSpPr>
-          <p:cNvPr id="5" name="TextBox 4"/>
+            <a:pPr algn="ctr"/>
+          </a:p>
+        </p:txBody>
+      </p:sp>
+      <p:sp>
+        <p:nvSpPr>
+          <p:cNvPr id="4" name="TextBox 3"/>
           <p:cNvSpPr txBox="1"/>
           <p:nvPr/>
         </p:nvSpPr>
         <p:spPr>
           <a:xfrm>
-            <a:off x="11430000" y="6492240"/>
-            <a:ext cx="548640" cy="365760"/>
+            <a:off x="2540000" y="6316133"/>
+            <a:ext cx="7112000" cy="508000"/>
           </a:xfrm>
           <a:prstGeom prst="rect">
             <a:avLst/>
@@ -3235,35 +3177,35 @@
           <a:noFill/>
         </p:spPr>
         <p:txBody>
-          <a:bodyPr wrap="none">
+          <a:bodyPr wrap="square">
             <a:spAutoFit/>
           </a:bodyPr>
           <a:lstStyle/>
           <a:p>
-            <a:pPr algn="r">
-              <a:defRPr sz="1000" b="1">
+            <a:pPr algn="ctr">
+              <a:defRPr sz="1700" b="1">
                 <a:solidFill>
                   <a:srgbClr val="FFFFFF"/>
                 </a:solidFill>
-                <a:latin typeface="Arial"/>
+                <a:latin typeface="Georgia"/>
               </a:defRPr>
             </a:pPr>
             <a:r>
-              <a:t>1</a:t>
-            </a:r>
-          </a:p>
-        </p:txBody>
-      </p:sp>
-      <p:sp>
-        <p:nvSpPr>
-          <p:cNvPr id="6" name="TextBox 5"/>
+              <a:t>SMART INDIA HACKATHON 2026</a:t>
+            </a:r>
+          </a:p>
+        </p:txBody>
+      </p:sp>
+      <p:sp>
+        <p:nvSpPr>
+          <p:cNvPr id="5" name="TextBox 4"/>
           <p:cNvSpPr txBox="1"/>
           <p:nvPr/>
         </p:nvSpPr>
         <p:spPr>
           <a:xfrm>
-            <a:off x="1828800" y="1005840"/>
-            <a:ext cx="8534095" cy="731520"/>
+            <a:off x="11176000" y="6316133"/>
+            <a:ext cx="846666" cy="508000"/>
           </a:xfrm>
           <a:prstGeom prst="rect">
             <a:avLst/>
@@ -3276,420 +3218,289 @@
           </a:bodyPr>
           <a:lstStyle/>
           <a:p>
+            <a:pPr algn="r">
+              <a:defRPr sz="1700" b="1">
+                <a:solidFill>
+                  <a:srgbClr val="FFFFFF"/>
+                </a:solidFill>
+                <a:latin typeface="Arial"/>
+              </a:defRPr>
+            </a:pPr>
+            <a:r>
+              <a:t>1</a:t>
+            </a:r>
+          </a:p>
+        </p:txBody>
+      </p:sp>
+      <p:sp>
+        <p:nvSpPr>
+          <p:cNvPr id="6" name="TextBox 5"/>
+          <p:cNvSpPr txBox="1"/>
+          <p:nvPr/>
+        </p:nvSpPr>
+        <p:spPr>
+          <a:xfrm>
+            <a:off x="1439333" y="211666"/>
+            <a:ext cx="8128000" cy="592666"/>
+          </a:xfrm>
+          <a:prstGeom prst="rect">
+            <a:avLst/>
+          </a:prstGeom>
+          <a:noFill/>
+        </p:spPr>
+        <p:txBody>
+          <a:bodyPr wrap="none">
+            <a:spAutoFit/>
+          </a:bodyPr>
+          <a:lstStyle/>
+          <a:p>
             <a:pPr algn="ctr">
-              <a:defRPr sz="2600" b="1">
-                <a:solidFill>
-                  <a:srgbClr val="191E24"/>
+              <a:defRPr sz="3400" b="1">
+                <a:solidFill>
+                  <a:srgbClr val="0B5394"/>
                 </a:solidFill>
                 <a:latin typeface="Georgia"/>
               </a:defRPr>
             </a:pPr>
             <a:r>
-              <a:t>TITLE PAGE</a:t>
-            </a:r>
-          </a:p>
-        </p:txBody>
-      </p:sp>
-      <p:sp>
-        <p:nvSpPr>
-          <p:cNvPr id="7" name="Rounded Rectangle 6"/>
-          <p:cNvSpPr/>
+              <a:t>SMART INDIA HACKATHON 2026</a:t>
+            </a:r>
+          </a:p>
+        </p:txBody>
+      </p:sp>
+      <p:sp>
+        <p:nvSpPr>
+          <p:cNvPr id="7" name="TextBox 6"/>
+          <p:cNvSpPr txBox="1"/>
           <p:nvPr/>
         </p:nvSpPr>
         <p:spPr>
           <a:xfrm>
-            <a:off x="914400" y="1828800"/>
-            <a:ext cx="7315200" cy="4297680"/>
-          </a:xfrm>
-          <a:prstGeom prst="roundRect">
+            <a:off x="2963333" y="1100666"/>
+            <a:ext cx="5080000" cy="508000"/>
+          </a:xfrm>
+          <a:prstGeom prst="rect">
             <a:avLst/>
           </a:prstGeom>
-          <a:solidFill>
-            <a:srgbClr val="FFFFFF"/>
-          </a:solidFill>
-          <a:ln w="19050">
-            <a:solidFill>
-              <a:srgbClr val="D7E1EB"/>
-            </a:solidFill>
-          </a:ln>
-        </p:spPr>
-        <p:style>
-          <a:lnRef idx="1">
-            <a:schemeClr val="accent1"/>
-          </a:lnRef>
-          <a:fillRef idx="3">
-            <a:schemeClr val="accent1"/>
-          </a:fillRef>
-          <a:effectRef idx="2">
-            <a:schemeClr val="accent1"/>
-          </a:effectRef>
-          <a:fontRef idx="minor">
-            <a:schemeClr val="lt1"/>
-          </a:fontRef>
-        </p:style>
-        <p:txBody>
-          <a:bodyPr rtlCol="0" anchor="t" wrap="square"/>
+          <a:noFill/>
+        </p:spPr>
+        <p:txBody>
+          <a:bodyPr wrap="none">
+            <a:spAutoFit/>
+          </a:bodyPr>
           <a:lstStyle/>
           <a:p>
             <a:pPr algn="ctr">
-              <a:spcAft>
-                <a:spcPts val="1000"/>
-              </a:spcAft>
-            </a:pPr>
-            <a:r>
-              <a:rPr sz="1400" b="1">
-                <a:solidFill>
-                  <a:srgbClr val="191E24"/>
-                </a:solidFill>
-                <a:latin typeface="Arial"/>
-              </a:rPr>
-              <a:t>- Problem Statement ID : </a:t>
-            </a:r>
-            <a:r>
-              <a:rPr sz="1300" b="0">
-                <a:solidFill>
-                  <a:srgbClr val="191E24"/>
-                </a:solidFill>
-                <a:latin typeface="Arial"/>
-              </a:rPr>
-              <a:t>DRDO-EW-2026 / SIH-26054</a:t>
-            </a:r>
-          </a:p>
-          <a:p>
-            <a:pPr>
-              <a:spcAft>
-                <a:spcPts val="1000"/>
-              </a:spcAft>
-            </a:pPr>
-            <a:r>
-              <a:rPr sz="1400" b="1">
-                <a:solidFill>
-                  <a:srgbClr val="191E24"/>
-                </a:solidFill>
-                <a:latin typeface="Arial"/>
-              </a:rPr>
-              <a:t>- Problem Statement Title : </a:t>
-            </a:r>
-            <a:r>
-              <a:rPr sz="1300" b="0">
-                <a:solidFill>
-                  <a:srgbClr val="1B56AC"/>
-                </a:solidFill>
-                <a:latin typeface="Arial"/>
-              </a:rPr>
-              <a:t>Smart Scan Strategy for Electronic Warfare in the Absence of Prior Reliable Intelligence of Emitters and their Operating Characteristics</a:t>
-            </a:r>
-          </a:p>
-          <a:p>
-            <a:pPr>
-              <a:spcAft>
-                <a:spcPts val="1000"/>
-              </a:spcAft>
-            </a:pPr>
-            <a:r>
-              <a:rPr sz="1400" b="1">
-                <a:solidFill>
-                  <a:srgbClr val="191E24"/>
-                </a:solidFill>
-                <a:latin typeface="Arial"/>
-              </a:rPr>
-              <a:t>- Organization : </a:t>
-            </a:r>
-            <a:r>
-              <a:rPr sz="1300" b="0">
-                <a:solidFill>
-                  <a:srgbClr val="191E24"/>
-                </a:solidFill>
-                <a:latin typeface="Arial"/>
-              </a:rPr>
-              <a:t>Defence Research and Development Organisation (DRDO)</a:t>
-            </a:r>
-          </a:p>
-          <a:p>
-            <a:pPr>
-              <a:spcAft>
-                <a:spcPts val="1000"/>
-              </a:spcAft>
-            </a:pPr>
-            <a:r>
-              <a:rPr sz="1400" b="1">
-                <a:solidFill>
-                  <a:srgbClr val="191E24"/>
-                </a:solidFill>
-                <a:latin typeface="Arial"/>
-              </a:rPr>
-              <a:t>- Department : </a:t>
-            </a:r>
-            <a:r>
-              <a:rPr sz="1300" b="0">
-                <a:solidFill>
-                  <a:srgbClr val="191E24"/>
-                </a:solidFill>
-                <a:latin typeface="Arial"/>
-              </a:rPr>
-              <a:t>Department of Defence R&amp;D</a:t>
-            </a:r>
-          </a:p>
-          <a:p>
-            <a:pPr>
-              <a:spcAft>
-                <a:spcPts val="1000"/>
-              </a:spcAft>
-            </a:pPr>
-            <a:r>
-              <a:rPr sz="1400" b="1">
-                <a:solidFill>
-                  <a:srgbClr val="191E24"/>
-                </a:solidFill>
-                <a:latin typeface="Arial"/>
-              </a:rPr>
-              <a:t>- Theme : </a:t>
-            </a:r>
-            <a:r>
-              <a:rPr sz="1300" b="0">
-                <a:solidFill>
-                  <a:srgbClr val="191E24"/>
-                </a:solidFill>
-                <a:latin typeface="Arial"/>
-              </a:rPr>
-              <a:t>Robotics and Drones</a:t>
-            </a:r>
-          </a:p>
-          <a:p>
-            <a:pPr>
-              <a:spcAft>
-                <a:spcPts val="1000"/>
-              </a:spcAft>
-            </a:pPr>
-            <a:r>
-              <a:rPr sz="1400" b="1">
-                <a:solidFill>
-                  <a:srgbClr val="191E24"/>
-                </a:solidFill>
-                <a:latin typeface="Arial"/>
-              </a:rPr>
-              <a:t>- PS Category : </a:t>
-            </a:r>
-            <a:r>
-              <a:rPr sz="1300" b="0">
-                <a:solidFill>
-                  <a:srgbClr val="191E24"/>
-                </a:solidFill>
-                <a:latin typeface="Arial"/>
-              </a:rPr>
-              <a:t>Software</a:t>
-            </a:r>
-          </a:p>
-          <a:p>
-            <a:pPr>
-              <a:spcAft>
-                <a:spcPts val="1000"/>
-              </a:spcAft>
-            </a:pPr>
-            <a:r>
-              <a:rPr sz="1400" b="1">
-                <a:solidFill>
-                  <a:srgbClr val="191E24"/>
-                </a:solidFill>
-                <a:latin typeface="Arial"/>
-              </a:rPr>
-              <a:t>- Team ID : </a:t>
-            </a:r>
-            <a:r>
-              <a:rPr sz="1300" b="0">
-                <a:solidFill>
-                  <a:srgbClr val="191E24"/>
-                </a:solidFill>
-                <a:latin typeface="Arial"/>
-              </a:rPr>
-              <a:t>468750</a:t>
-            </a:r>
-          </a:p>
-          <a:p>
-            <a:pPr>
-              <a:spcAft>
-                <a:spcPts val="1000"/>
-              </a:spcAft>
-            </a:pPr>
-            <a:r>
-              <a:rPr sz="1400" b="1">
-                <a:solidFill>
-                  <a:srgbClr val="191E24"/>
-                </a:solidFill>
-                <a:latin typeface="Arial"/>
-              </a:rPr>
-              <a:t>- Team Name : </a:t>
-            </a:r>
-            <a:r>
-              <a:rPr sz="1300" b="0">
-                <a:solidFill>
-                  <a:srgbClr val="1B56AC"/>
-                </a:solidFill>
-                <a:latin typeface="Arial"/>
-              </a:rPr>
-              <a:t>numenors</a:t>
-            </a:r>
-          </a:p>
-        </p:txBody>
-      </p:sp>
-      <p:sp>
-        <p:nvSpPr>
-          <p:cNvPr id="8" name="Rounded Rectangle 7"/>
-          <p:cNvSpPr/>
-          <p:nvPr/>
-        </p:nvSpPr>
-        <p:spPr>
-          <a:xfrm>
-            <a:off x="8503920" y="1828800"/>
-            <a:ext cx="2926080" cy="4297680"/>
-          </a:xfrm>
-          <a:prstGeom prst="roundRect">
-            <a:avLst/>
-          </a:prstGeom>
-          <a:solidFill>
-            <a:srgbClr val="EBF3FC"/>
-          </a:solidFill>
-          <a:ln w="19050">
-            <a:solidFill>
-              <a:srgbClr val="1B56AC"/>
-            </a:solidFill>
-          </a:ln>
-        </p:spPr>
-        <p:style>
-          <a:lnRef idx="1">
-            <a:schemeClr val="accent1"/>
-          </a:lnRef>
-          <a:fillRef idx="3">
-            <a:schemeClr val="accent1"/>
-          </a:fillRef>
-          <a:effectRef idx="2">
-            <a:schemeClr val="accent1"/>
-          </a:effectRef>
-          <a:fontRef idx="minor">
-            <a:schemeClr val="lt1"/>
-          </a:fontRef>
-        </p:style>
-        <p:txBody>
-          <a:bodyPr rtlCol="0" anchor="ctr" wrap="square"/>
-          <a:lstStyle/>
-          <a:p>
-            <a:pPr algn="ctr">
-              <a:spcAft>
-                <a:spcPts val="1400"/>
-              </a:spcAft>
-              <a:defRPr sz="1800" b="1">
-                <a:solidFill>
-                  <a:srgbClr val="102C57"/>
+              <a:defRPr sz="3200" b="1">
+                <a:solidFill>
+                  <a:srgbClr val="0F172A"/>
                 </a:solidFill>
                 <a:latin typeface="Georgia"/>
               </a:defRPr>
             </a:pPr>
             <a:r>
-              <a:t>SENTINEL-SCAN</a:t>
-            </a:r>
-            <a:br/>
-            <a:r>
-              <a:t>Cognitive EW System</a:t>
-            </a:r>
-          </a:p>
+              <a:t>TITLE PAGE</a:t>
+            </a:r>
+          </a:p>
+        </p:txBody>
+      </p:sp>
+      <p:sp>
+        <p:nvSpPr>
+          <p:cNvPr id="8" name="TextBox 7"/>
+          <p:cNvSpPr txBox="1"/>
+          <p:nvPr/>
+        </p:nvSpPr>
+        <p:spPr>
+          <a:xfrm>
+            <a:off x="719666" y="1778000"/>
+            <a:ext cx="8297333" cy="4233333"/>
+          </a:xfrm>
+          <a:prstGeom prst="rect">
+            <a:avLst/>
+          </a:prstGeom>
+          <a:noFill/>
+        </p:spPr>
+        <p:txBody>
+          <a:bodyPr wrap="square">
+            <a:spAutoFit/>
+          </a:bodyPr>
+          <a:lstStyle/>
           <a:p>
             <a:pPr>
               <a:spcAft>
-                <a:spcPts val="800"/>
+                <a:spcPts val="2200"/>
               </a:spcAft>
-              <a:defRPr sz="1200" b="1">
-                <a:solidFill>
-                  <a:srgbClr val="191E24"/>
-                </a:solidFill>
-                <a:latin typeface="Arial"/>
-              </a:defRPr>
             </a:pPr>
             <a:r>
-              <a:t>[+]  Cognitive ES Receiver</a:t>
+              <a:rPr sz="2100" b="1">
+                <a:solidFill>
+                  <a:srgbClr val="0F172A"/>
+                </a:solidFill>
+                <a:latin typeface="Segoe UI"/>
+              </a:rPr>
+              <a:t>• Problem Statement ID – </a:t>
+            </a:r>
+            <a:r>
+              <a:rPr sz="2100" b="0">
+                <a:solidFill>
+                  <a:srgbClr val="1E293B"/>
+                </a:solidFill>
+                <a:latin typeface="Segoe UI"/>
+              </a:rPr>
+              <a:t>26055</a:t>
             </a:r>
           </a:p>
           <a:p>
             <a:pPr>
               <a:spcAft>
-                <a:spcPts val="800"/>
+                <a:spcPts val="2200"/>
               </a:spcAft>
-              <a:defRPr sz="1200" b="1">
-                <a:solidFill>
-                  <a:srgbClr val="191E24"/>
-                </a:solidFill>
-                <a:latin typeface="Arial"/>
-              </a:defRPr>
             </a:pPr>
             <a:r>
-              <a:t>[+]  Deep Q-Network Policy</a:t>
+              <a:rPr sz="2100" b="1">
+                <a:solidFill>
+                  <a:srgbClr val="0F172A"/>
+                </a:solidFill>
+                <a:latin typeface="Segoe UI"/>
+              </a:rPr>
+              <a:t>• Problem Statement Title- </a:t>
+            </a:r>
+            <a:r>
+              <a:rPr sz="2100" b="0">
+                <a:solidFill>
+                  <a:srgbClr val="1E293B"/>
+                </a:solidFill>
+                <a:latin typeface="Segoe UI"/>
+              </a:rPr>
+              <a:t>Smart Scan Strategy for Electronic Warfare</a:t>
             </a:r>
           </a:p>
           <a:p>
             <a:pPr>
               <a:spcAft>
-                <a:spcPts val="800"/>
+                <a:spcPts val="2200"/>
               </a:spcAft>
-              <a:defRPr sz="1200" b="1">
-                <a:solidFill>
-                  <a:srgbClr val="191E24"/>
-                </a:solidFill>
-                <a:latin typeface="Arial"/>
-              </a:defRPr>
             </a:pPr>
             <a:r>
-              <a:t>[+]  Non-Stationary Bandits</a:t>
+              <a:rPr sz="2100" b="1">
+                <a:solidFill>
+                  <a:srgbClr val="0F172A"/>
+                </a:solidFill>
+                <a:latin typeface="Segoe UI"/>
+              </a:rPr>
+              <a:t>• Theme- </a:t>
+            </a:r>
+            <a:r>
+              <a:rPr sz="2100" b="0">
+                <a:solidFill>
+                  <a:srgbClr val="1E293B"/>
+                </a:solidFill>
+                <a:latin typeface="Segoe UI"/>
+              </a:rPr>
+              <a:t>Robotics and Drones</a:t>
             </a:r>
           </a:p>
           <a:p>
             <a:pPr>
               <a:spcAft>
-                <a:spcPts val="800"/>
+                <a:spcPts val="2200"/>
               </a:spcAft>
-              <a:defRPr sz="1200" b="1">
-                <a:solidFill>
-                  <a:srgbClr val="191E24"/>
-                </a:solidFill>
-                <a:latin typeface="Arial"/>
-              </a:defRPr>
             </a:pPr>
             <a:r>
-              <a:t>[+]  Turing Synthetic Radar</a:t>
+              <a:rPr sz="2100" b="1">
+                <a:solidFill>
+                  <a:srgbClr val="0F172A"/>
+                </a:solidFill>
+                <a:latin typeface="Segoe UI"/>
+              </a:rPr>
+              <a:t>• PS Category- </a:t>
+            </a:r>
+            <a:r>
+              <a:rPr sz="2100" b="0">
+                <a:solidFill>
+                  <a:srgbClr val="1E293B"/>
+                </a:solidFill>
+                <a:latin typeface="Segoe UI"/>
+              </a:rPr>
+              <a:t>Software</a:t>
             </a:r>
           </a:p>
           <a:p>
             <a:pPr>
               <a:spcAft>
-                <a:spcPts val="800"/>
+                <a:spcPts val="2200"/>
               </a:spcAft>
-              <a:defRPr sz="1200" b="1">
-                <a:solidFill>
-                  <a:srgbClr val="191E24"/>
-                </a:solidFill>
-                <a:latin typeface="Arial"/>
-              </a:defRPr>
             </a:pPr>
             <a:r>
-              <a:t>[+]  360 PPI C2 Scope</a:t>
+              <a:rPr sz="2100" b="1">
+                <a:solidFill>
+                  <a:srgbClr val="0F172A"/>
+                </a:solidFill>
+                <a:latin typeface="Segoe UI"/>
+              </a:rPr>
+              <a:t>• Team ID- </a:t>
+            </a:r>
+            <a:r>
+              <a:rPr sz="2100" b="0">
+                <a:solidFill>
+                  <a:srgbClr val="1E293B"/>
+                </a:solidFill>
+                <a:latin typeface="Segoe UI"/>
+              </a:rPr>
+              <a:t>468750</a:t>
             </a:r>
           </a:p>
           <a:p>
             <a:pPr>
               <a:spcAft>
-                <a:spcPts val="800"/>
+                <a:spcPts val="2200"/>
               </a:spcAft>
-              <a:defRPr sz="1200" b="1">
-                <a:solidFill>
-                  <a:srgbClr val="191E24"/>
-                </a:solidFill>
-                <a:latin typeface="Arial"/>
-              </a:defRPr>
             </a:pPr>
             <a:r>
-              <a:t>[+]  97.3% Hit Rate</a:t>
-            </a:r>
-          </a:p>
-        </p:txBody>
-      </p:sp>
+              <a:rPr sz="2100" b="1">
+                <a:solidFill>
+                  <a:srgbClr val="0F172A"/>
+                </a:solidFill>
+                <a:latin typeface="Segoe UI"/>
+              </a:rPr>
+              <a:t>• Team Name (Registered on portal)- </a:t>
+            </a:r>
+            <a:r>
+              <a:rPr sz="2100" b="0">
+                <a:solidFill>
+                  <a:srgbClr val="1E293B"/>
+                </a:solidFill>
+                <a:latin typeface="Segoe UI"/>
+              </a:rPr>
+              <a:t>numenors</a:t>
+            </a:r>
+          </a:p>
+        </p:txBody>
+      </p:sp>
+      <p:pic>
+        <p:nvPicPr>
+          <p:cNvPr id="9" name="Picture 8" descr="sih_bulb_white.png"/>
+          <p:cNvPicPr>
+            <a:picLocks noChangeAspect="1"/>
+          </p:cNvPicPr>
+          <p:nvPr/>
+        </p:nvPicPr>
+        <p:blipFill>
+          <a:blip r:embed="rId3"/>
+          <a:stretch>
+            <a:fillRect/>
+          </a:stretch>
+        </p:blipFill>
+        <p:spPr>
+          <a:xfrm>
+            <a:off x="9144000" y="1481666"/>
+            <a:ext cx="2514600" cy="4064000"/>
+          </a:xfrm>
+          <a:prstGeom prst="rect">
+            <a:avLst/>
+          </a:prstGeom>
+        </p:spPr>
+      </p:pic>
     </p:spTree>
   </p:cSld>
   <p:clrMapOvr>
@@ -3708,99 +3519,49 @@
         <p:nvPr/>
       </p:nvGrpSpPr>
       <p:grpSpPr/>
-      <p:sp>
-        <p:nvSpPr>
-          <p:cNvPr id="2" name="TextBox 1"/>
-          <p:cNvSpPr txBox="1"/>
+      <p:pic>
+        <p:nvPicPr>
+          <p:cNvPr id="2" name="Picture 1" descr="sih_logo_clean.png"/>
+          <p:cNvPicPr>
+            <a:picLocks noChangeAspect="1"/>
+          </p:cNvPicPr>
           <p:nvPr/>
-        </p:nvSpPr>
-        <p:spPr>
-          <a:xfrm>
-            <a:off x="731520" y="228600"/>
-            <a:ext cx="7315200" cy="365760"/>
+        </p:nvPicPr>
+        <p:blipFill>
+          <a:blip r:embed="rId2"/>
+          <a:stretch>
+            <a:fillRect/>
+          </a:stretch>
+        </p:blipFill>
+        <p:spPr>
+          <a:xfrm>
+            <a:off x="9821333" y="127000"/>
+            <a:ext cx="2116666" cy="914400"/>
           </a:xfrm>
           <a:prstGeom prst="rect">
             <a:avLst/>
           </a:prstGeom>
-          <a:noFill/>
-        </p:spPr>
-        <p:txBody>
-          <a:bodyPr wrap="square">
-            <a:spAutoFit/>
-          </a:bodyPr>
-          <a:lstStyle/>
-          <a:p>
-            <a:pPr>
-              <a:defRPr sz="1400" b="1">
-                <a:solidFill>
-                  <a:srgbClr val="102C57"/>
-                </a:solidFill>
-                <a:latin typeface="Georgia"/>
-              </a:defRPr>
-            </a:pPr>
-            <a:r>
-              <a:t>SMART INDIA HACKATHON 2026</a:t>
-            </a:r>
-          </a:p>
-        </p:txBody>
-      </p:sp>
-      <p:sp>
-        <p:nvSpPr>
-          <p:cNvPr id="3" name="TextBox 2"/>
-          <p:cNvSpPr txBox="1"/>
+        </p:spPr>
+      </p:pic>
+      <p:sp>
+        <p:nvSpPr>
+          <p:cNvPr id="3" name="Rectangle 2"/>
+          <p:cNvSpPr/>
           <p:nvPr/>
         </p:nvSpPr>
         <p:spPr>
           <a:xfrm>
-            <a:off x="9601200" y="182880"/>
-            <a:ext cx="2011680" cy="457200"/>
+            <a:off x="0" y="6299200"/>
+            <a:ext cx="12192000" cy="558800"/>
           </a:xfrm>
           <a:prstGeom prst="rect">
             <a:avLst/>
           </a:prstGeom>
-          <a:noFill/>
-        </p:spPr>
-        <p:txBody>
-          <a:bodyPr wrap="none">
-            <a:spAutoFit/>
-          </a:bodyPr>
-          <a:lstStyle/>
-          <a:p>
-            <a:pPr algn="r">
-              <a:defRPr sz="1100" b="1">
-                <a:solidFill>
-                  <a:srgbClr val="1B56AC"/>
-                </a:solidFill>
-                <a:latin typeface="Arial"/>
-              </a:defRPr>
-            </a:pPr>
-            <a:r>
-              <a:t>SIH 2026 // DRDO</a:t>
-            </a:r>
-          </a:p>
-        </p:txBody>
-      </p:sp>
-      <p:sp>
-        <p:nvSpPr>
-          <p:cNvPr id="4" name="Rounded Rectangle 3"/>
-          <p:cNvSpPr/>
-          <p:nvPr/>
-        </p:nvSpPr>
-        <p:spPr>
-          <a:xfrm>
-            <a:off x="731520" y="640080"/>
-            <a:ext cx="1371600" cy="320040"/>
-          </a:xfrm>
-          <a:prstGeom prst="roundRect">
-            <a:avLst/>
-          </a:prstGeom>
           <a:solidFill>
-            <a:srgbClr val="FFFFFF"/>
+            <a:srgbClr val="0B5394"/>
           </a:solidFill>
-          <a:ln w="12700">
-            <a:solidFill>
-              <a:srgbClr val="D7E1EB"/>
-            </a:solidFill>
+          <a:ln>
+            <a:noFill/>
           </a:ln>
         </p:spPr>
         <p:style>
@@ -3821,30 +3582,20 @@
           <a:bodyPr rtlCol="0" anchor="ctr"/>
           <a:lstStyle/>
           <a:p>
-            <a:pPr algn="ctr">
-              <a:defRPr sz="1100" b="1">
-                <a:solidFill>
-                  <a:srgbClr val="191E24"/>
-                </a:solidFill>
-                <a:latin typeface="Arial"/>
-              </a:defRPr>
-            </a:pPr>
-            <a:r>
-              <a:t>numenors</a:t>
-            </a:r>
-          </a:p>
-        </p:txBody>
-      </p:sp>
-      <p:sp>
-        <p:nvSpPr>
-          <p:cNvPr id="5" name="TextBox 4"/>
+            <a:pPr algn="ctr"/>
+          </a:p>
+        </p:txBody>
+      </p:sp>
+      <p:sp>
+        <p:nvSpPr>
+          <p:cNvPr id="4" name="TextBox 3"/>
           <p:cNvSpPr txBox="1"/>
           <p:nvPr/>
         </p:nvSpPr>
         <p:spPr>
           <a:xfrm>
-            <a:off x="2286000" y="548640"/>
-            <a:ext cx="7315200" cy="548640"/>
+            <a:off x="2540000" y="6316133"/>
+            <a:ext cx="7112000" cy="508000"/>
           </a:xfrm>
           <a:prstGeom prst="rect">
             <a:avLst/>
@@ -3852,44 +3603,82 @@
           <a:noFill/>
         </p:spPr>
         <p:txBody>
+          <a:bodyPr wrap="square">
+            <a:spAutoFit/>
+          </a:bodyPr>
+          <a:lstStyle/>
+          <a:p>
+            <a:pPr algn="ctr">
+              <a:defRPr sz="1700" b="1">
+                <a:solidFill>
+                  <a:srgbClr val="FFFFFF"/>
+                </a:solidFill>
+                <a:latin typeface="Georgia"/>
+              </a:defRPr>
+            </a:pPr>
+            <a:r>
+              <a:t>SMART INDIA HACKATHON 2026</a:t>
+            </a:r>
+          </a:p>
+        </p:txBody>
+      </p:sp>
+      <p:sp>
+        <p:nvSpPr>
+          <p:cNvPr id="5" name="TextBox 4"/>
+          <p:cNvSpPr txBox="1"/>
+          <p:nvPr/>
+        </p:nvSpPr>
+        <p:spPr>
+          <a:xfrm>
+            <a:off x="11176000" y="6316133"/>
+            <a:ext cx="846666" cy="508000"/>
+          </a:xfrm>
+          <a:prstGeom prst="rect">
+            <a:avLst/>
+          </a:prstGeom>
+          <a:noFill/>
+        </p:spPr>
+        <p:txBody>
           <a:bodyPr wrap="none">
             <a:spAutoFit/>
           </a:bodyPr>
           <a:lstStyle/>
           <a:p>
-            <a:pPr>
-              <a:defRPr sz="2200" b="1">
-                <a:solidFill>
-                  <a:srgbClr val="191E24"/>
-                </a:solidFill>
-                <a:latin typeface="Georgia"/>
+            <a:pPr algn="r">
+              <a:defRPr sz="1700" b="1">
+                <a:solidFill>
+                  <a:srgbClr val="FFFFFF"/>
+                </a:solidFill>
+                <a:latin typeface="Arial"/>
               </a:defRPr>
             </a:pPr>
             <a:r>
-              <a:t>PROPOSED SOLUTION</a:t>
-            </a:r>
-          </a:p>
-        </p:txBody>
-      </p:sp>
-      <p:sp>
-        <p:nvSpPr>
-          <p:cNvPr id="6" name="Rectangle 5"/>
+              <a:t>2</a:t>
+            </a:r>
+          </a:p>
+        </p:txBody>
+      </p:sp>
+      <p:sp>
+        <p:nvSpPr>
+          <p:cNvPr id="6" name="Oval 5"/>
           <p:cNvSpPr/>
           <p:nvPr/>
         </p:nvSpPr>
         <p:spPr>
           <a:xfrm>
-            <a:off x="0" y="6492240"/>
-            <a:ext cx="12191695" cy="365760"/>
-          </a:xfrm>
-          <a:prstGeom prst="rect">
+            <a:off x="270933" y="237066"/>
+            <a:ext cx="1439333" cy="660400"/>
+          </a:xfrm>
+          <a:prstGeom prst="ellipse">
             <a:avLst/>
           </a:prstGeom>
           <a:solidFill>
-            <a:srgbClr val="102C57"/>
+            <a:srgbClr val="FFFFFF"/>
           </a:solidFill>
-          <a:ln>
-            <a:noFill/>
+          <a:ln w="31750">
+            <a:solidFill>
+              <a:srgbClr val="5E35B1"/>
+            </a:solidFill>
           </a:ln>
         </p:spPr>
         <p:style>
@@ -3907,19 +3696,19 @@
           </a:fontRef>
         </p:style>
         <p:txBody>
-          <a:bodyPr rtlCol="0" anchor="ctr"/>
+          <a:bodyPr rtlCol="0" anchor="ctr" wrap="none" lIns="0" rIns="0" tIns="0" bIns="0"/>
           <a:lstStyle/>
           <a:p>
             <a:pPr algn="ctr">
-              <a:defRPr sz="1000">
-                <a:solidFill>
-                  <a:srgbClr val="FFFFFF"/>
-                </a:solidFill>
-                <a:latin typeface="Arial"/>
+              <a:defRPr sz="2100" b="1">
+                <a:solidFill>
+                  <a:srgbClr val="141414"/>
+                </a:solidFill>
+                <a:latin typeface="Calibri"/>
               </a:defRPr>
             </a:pPr>
             <a:r>
-              <a:t>SMART INDIA HACKATHON 2026</a:t>
+              <a:t>numenors</a:t>
             </a:r>
           </a:p>
         </p:txBody>
@@ -3932,8 +3721,8 @@
         </p:nvSpPr>
         <p:spPr>
           <a:xfrm>
-            <a:off x="11430000" y="6492240"/>
-            <a:ext cx="548640" cy="365760"/>
+            <a:off x="1693333" y="211666"/>
+            <a:ext cx="7958666" cy="592666"/>
           </a:xfrm>
           <a:prstGeom prst="rect">
             <a:avLst/>
@@ -3946,16 +3735,16 @@
           </a:bodyPr>
           <a:lstStyle/>
           <a:p>
-            <a:pPr algn="r">
-              <a:defRPr sz="1000" b="1">
-                <a:solidFill>
-                  <a:srgbClr val="FFFFFF"/>
-                </a:solidFill>
-                <a:latin typeface="Arial"/>
+            <a:pPr algn="ctr">
+              <a:defRPr sz="3600" b="1">
+                <a:solidFill>
+                  <a:srgbClr val="0F172A"/>
+                </a:solidFill>
+                <a:latin typeface="Georgia"/>
               </a:defRPr>
             </a:pPr>
             <a:r>
-              <a:t>2</a:t>
+              <a:t>SENTINEL-EW</a:t>
             </a:r>
           </a:p>
         </p:txBody>
@@ -3968,8 +3757,8 @@
         </p:nvSpPr>
         <p:spPr>
           <a:xfrm>
-            <a:off x="2286000" y="1051560"/>
-            <a:ext cx="7315200" cy="365760"/>
+            <a:off x="2032000" y="626533"/>
+            <a:ext cx="7281333" cy="321733"/>
           </a:xfrm>
           <a:prstGeom prst="rect">
             <a:avLst/>
@@ -3982,16 +3771,16 @@
           </a:bodyPr>
           <a:lstStyle/>
           <a:p>
-            <a:pPr>
-              <a:defRPr sz="1300" b="1">
-                <a:solidFill>
-                  <a:srgbClr val="1B56AC"/>
-                </a:solidFill>
-                <a:latin typeface="Arial"/>
+            <a:pPr algn="ctr">
+              <a:defRPr sz="1700" i="0">
+                <a:solidFill>
+                  <a:srgbClr val="475569"/>
+                </a:solidFill>
+                <a:latin typeface="Georgia"/>
               </a:defRPr>
             </a:pPr>
             <a:r>
-              <a:t>SENTINEL-SCAN: Turning Wideband Uncertainty into Predictive Intercept Intelligence</a:t>
+              <a:t>Turning Wideband Spectrum Uncertainty into Predictive Intercept Intelligence</a:t>
             </a:r>
           </a:p>
         </p:txBody>
@@ -4004,19 +3793,17 @@
         </p:nvSpPr>
         <p:spPr>
           <a:xfrm>
-            <a:off x="731520" y="1463040"/>
-            <a:ext cx="5486400" cy="4663440"/>
+            <a:off x="203200" y="1066800"/>
+            <a:ext cx="3556000" cy="372533"/>
           </a:xfrm>
           <a:prstGeom prst="roundRect">
             <a:avLst/>
           </a:prstGeom>
           <a:solidFill>
-            <a:srgbClr val="FFFFFF"/>
+            <a:srgbClr val="005596"/>
           </a:solidFill>
-          <a:ln w="12700">
-            <a:solidFill>
-              <a:srgbClr val="D7E1EB"/>
-            </a:solidFill>
+          <a:ln>
+            <a:noFill/>
           </a:ln>
         </p:spPr>
         <p:style>
@@ -4034,131 +3821,19 @@
           </a:fontRef>
         </p:style>
         <p:txBody>
-          <a:bodyPr rtlCol="0" anchor="ctr" wrap="square" tIns="502920"/>
+          <a:bodyPr rtlCol="0" anchor="ctr"/>
           <a:lstStyle/>
           <a:p>
             <a:pPr algn="ctr">
-              <a:spcAft>
-                <a:spcPts val="1000"/>
-              </a:spcAft>
+              <a:defRPr sz="2200" b="1">
+                <a:solidFill>
+                  <a:srgbClr val="FFFFFF"/>
+                </a:solidFill>
+                <a:latin typeface="Georgia"/>
+              </a:defRPr>
             </a:pPr>
             <a:r>
-              <a:rPr sz="1100" b="1">
-                <a:solidFill>
-                  <a:srgbClr val="191E24"/>
-                </a:solidFill>
-                <a:latin typeface="Arial"/>
-              </a:rPr>
-              <a:t>- Closed-Loop Cognitive Scheduling:</a:t>
-            </a:r>
-            <a:r>
-              <a:rPr sz="1050">
-                <a:solidFill>
-                  <a:srgbClr val="505F6E"/>
-                </a:solidFill>
-                <a:latin typeface="Arial"/>
-              </a:rPr>
-              <a:t> Solves the 2D search problem (frequency f, time t) under instantaneous bandwidth constraints (IBW &lt;&lt; B_sys), eliminating blind open-loop sweeps.</a:t>
-            </a:r>
-          </a:p>
-          <a:p>
-            <a:pPr>
-              <a:spcAft>
-                <a:spcPts val="1000"/>
-              </a:spcAft>
-            </a:pPr>
-            <a:r>
-              <a:rPr sz="1100" b="1">
-                <a:solidFill>
-                  <a:srgbClr val="191E24"/>
-                </a:solidFill>
-                <a:latin typeface="Arial"/>
-              </a:rPr>
-              <a:t>- Physics-Based Simulated RF Environment:</a:t>
-            </a:r>
-            <a:r>
-              <a:rPr sz="1050">
-                <a:solidFill>
-                  <a:srgbClr val="505F6E"/>
-                </a:solidFill>
-                <a:latin typeface="Arial"/>
-              </a:rPr>
-              <a:t> Models rotating search radar antenna patterns G(theta, t), frequency-agile hoppers, and drone data links with ground-truth matrices.</a:t>
-            </a:r>
-          </a:p>
-          <a:p>
-            <a:pPr>
-              <a:spcAft>
-                <a:spcPts val="1000"/>
-              </a:spcAft>
-            </a:pPr>
-            <a:r>
-              <a:rPr sz="1100" b="1">
-                <a:solidFill>
-                  <a:srgbClr val="191E24"/>
-                </a:solidFill>
-                <a:latin typeface="Arial"/>
-              </a:rPr>
-              <a:t>- Reinforcement Learning &amp; Bandit Scheduling:</a:t>
-            </a:r>
-            <a:r>
-              <a:rPr sz="1050">
-                <a:solidFill>
-                  <a:srgbClr val="505F6E"/>
-                </a:solidFill>
-                <a:latin typeface="Arial"/>
-              </a:rPr>
-              <a:t> Deploys Deep Q-Networks (DQN), Discounted UCB (gamma=0.90), and EXP3 to learn threat occupancies dynamically from hits and misses.</a:t>
-            </a:r>
-          </a:p>
-          <a:p>
-            <a:pPr>
-              <a:spcAft>
-                <a:spcPts val="1000"/>
-              </a:spcAft>
-            </a:pPr>
-            <a:r>
-              <a:rPr sz="1100" b="1">
-                <a:solidFill>
-                  <a:srgbClr val="191E24"/>
-                </a:solidFill>
-                <a:latin typeface="Arial"/>
-              </a:rPr>
-              <a:t>- Lookahead Predictive Temporal Interception:</a:t>
-            </a:r>
-            <a:r>
-              <a:rPr sz="1050">
-                <a:solidFill>
-                  <a:srgbClr val="505F6E"/>
-                </a:solidFill>
-                <a:latin typeface="Arial"/>
-              </a:rPr>
-              <a:t> Estimates scan periods (T_scan) online to predict radar beam illumination times, minimizing Average Intercept Time Error (Delta t &lt; 38 ms).</a:t>
-            </a:r>
-          </a:p>
-          <a:p>
-            <a:pPr>
-              <a:spcAft>
-                <a:spcPts val="1000"/>
-              </a:spcAft>
-            </a:pPr>
-            <a:r>
-              <a:rPr sz="1100" b="1">
-                <a:solidFill>
-                  <a:srgbClr val="191E24"/>
-                </a:solidFill>
-                <a:latin typeface="Arial"/>
-              </a:rPr>
-              <a:t>- Tactical C2 Command &amp; Control Dashboard:</a:t>
-            </a:r>
-            <a:r>
-              <a:rPr sz="1050">
-                <a:solidFill>
-                  <a:srgbClr val="505F6E"/>
-                </a:solidFill>
-                <a:latin typeface="Arial"/>
-              </a:rPr>
-              <a:t> Real-time 2D time-frequency waterfall, 360 PPI radar scope with Angle of Arrival (AoA) target tracking, and live PDW decoders.</a:t>
+              <a:t>Proposed Solution</a:t>
             </a:r>
           </a:p>
         </p:txBody>
@@ -4171,17 +3846,19 @@
         </p:nvSpPr>
         <p:spPr>
           <a:xfrm>
-            <a:off x="822960" y="1554480"/>
-            <a:ext cx="2011680" cy="320040"/>
+            <a:off x="203200" y="1507066"/>
+            <a:ext cx="6519333" cy="4656666"/>
           </a:xfrm>
           <a:prstGeom prst="roundRect">
             <a:avLst/>
           </a:prstGeom>
           <a:solidFill>
-            <a:srgbClr val="1B56AC"/>
+            <a:srgbClr val="FFFFFF"/>
           </a:solidFill>
-          <a:ln>
-            <a:noFill/>
+          <a:ln w="31750">
+            <a:solidFill>
+              <a:srgbClr val="0F172A"/>
+            </a:solidFill>
           </a:ln>
         </p:spPr>
         <p:style>
@@ -4199,402 +3876,198 @@
           </a:fontRef>
         </p:style>
         <p:txBody>
-          <a:bodyPr rtlCol="0" anchor="ctr"/>
+          <a:bodyPr rtlCol="0" anchor="ctr" wrap="square" lIns="203200" rIns="203200" tIns="203200" bIns="203200"/>
           <a:lstStyle/>
           <a:p>
             <a:pPr algn="ctr">
-              <a:defRPr sz="1100" b="1">
-                <a:solidFill>
-                  <a:srgbClr val="FFFFFF"/>
-                </a:solidFill>
-                <a:latin typeface="Arial"/>
-              </a:defRPr>
+              <a:lnSpc>
+                <a:spcPct val="115000"/>
+              </a:lnSpc>
+              <a:spcAft>
+                <a:spcPts val="1400"/>
+              </a:spcAft>
             </a:pPr>
             <a:r>
-              <a:t>Proposed Solution</a:t>
+              <a:rPr sz="1400" b="1">
+                <a:solidFill>
+                  <a:srgbClr val="0F172A"/>
+                </a:solidFill>
+                <a:latin typeface="Segoe UI"/>
+              </a:rPr>
+              <a:t>• Dynamic Wideband Sweeping:</a:t>
+            </a:r>
+            <a:r>
+              <a:rPr sz="1400" b="0">
+                <a:solidFill>
+                  <a:srgbClr val="334155"/>
+                </a:solidFill>
+                <a:latin typeface="Segoe UI"/>
+              </a:rPr>
+              <a:t> Sweeps multi-GHz threat spectrums using narrow instantaneous bandwidth (IBW) receivers, replacing rigid open-loop schedules with closed-loop adaptive dwell allocation.</a:t>
+            </a:r>
+          </a:p>
+          <a:p>
+            <a:pPr>
+              <a:lnSpc>
+                <a:spcPct val="115000"/>
+              </a:lnSpc>
+              <a:spcAft>
+                <a:spcPts val="1400"/>
+              </a:spcAft>
+            </a:pPr>
+            <a:r>
+              <a:rPr sz="1400" b="1">
+                <a:solidFill>
+                  <a:srgbClr val="0F172A"/>
+                </a:solidFill>
+                <a:latin typeface="Segoe UI"/>
+              </a:rPr>
+              <a:t>• Non-Stationary Multi-Armed Bandits:</a:t>
+            </a:r>
+            <a:r>
+              <a:rPr sz="1400" b="0">
+                <a:solidFill>
+                  <a:srgbClr val="334155"/>
+                </a:solidFill>
+                <a:latin typeface="Segoe UI"/>
+              </a:rPr>
+              <a:t> Employs Discounted-UCB and EXP3 algorithms to dynamically learn emitter presence without requiring pre-mission intelligence databases.</a:t>
+            </a:r>
+          </a:p>
+          <a:p>
+            <a:pPr>
+              <a:lnSpc>
+                <a:spcPct val="115000"/>
+              </a:lnSpc>
+              <a:spcAft>
+                <a:spcPts val="1400"/>
+              </a:spcAft>
+            </a:pPr>
+            <a:r>
+              <a:rPr sz="1400" b="1">
+                <a:solidFill>
+                  <a:srgbClr val="0F172A"/>
+                </a:solidFill>
+                <a:latin typeface="Segoe UI"/>
+              </a:rPr>
+              <a:t>• Deep Q-Network (DQN) Scheduling:</a:t>
+            </a:r>
+            <a:r>
+              <a:rPr sz="1400" b="0">
+                <a:solidFill>
+                  <a:srgbClr val="334155"/>
+                </a:solidFill>
+                <a:latin typeface="Segoe UI"/>
+              </a:rPr>
+              <a:t> Reinforcement learning policy trained on 100,000+ radar pulse bursts, maximizing intercept probability (Pd) and achieving +32.36 cumulative reward.</a:t>
+            </a:r>
+          </a:p>
+          <a:p>
+            <a:pPr>
+              <a:lnSpc>
+                <a:spcPct val="115000"/>
+              </a:lnSpc>
+              <a:spcAft>
+                <a:spcPts val="1400"/>
+              </a:spcAft>
+            </a:pPr>
+            <a:r>
+              <a:rPr sz="1400" b="1">
+                <a:solidFill>
+                  <a:srgbClr val="0F172A"/>
+                </a:solidFill>
+                <a:latin typeface="Segoe UI"/>
+              </a:rPr>
+              <a:t>• Predictive Intercept Engine:</a:t>
+            </a:r>
+            <a:r>
+              <a:rPr sz="1400" b="0">
+                <a:solidFill>
+                  <a:srgbClr val="334155"/>
+                </a:solidFill>
+                <a:latin typeface="Segoe UI"/>
+              </a:rPr>
+              <a:t> Synchronizes receiver dwells with hostile rotating radar scan intervals, cutting lookahead intercept error down to 38.0 ms.</a:t>
+            </a:r>
+          </a:p>
+          <a:p>
+            <a:pPr>
+              <a:lnSpc>
+                <a:spcPct val="115000"/>
+              </a:lnSpc>
+              <a:spcAft>
+                <a:spcPts val="1400"/>
+              </a:spcAft>
+            </a:pPr>
+            <a:r>
+              <a:rPr sz="1400" b="1">
+                <a:solidFill>
+                  <a:srgbClr val="0F172A"/>
+                </a:solidFill>
+                <a:latin typeface="Segoe UI"/>
+              </a:rPr>
+              <a:t>• Closed-Loop Mission Intelligence &amp; C2:</a:t>
+            </a:r>
+            <a:r>
+              <a:rPr sz="1400" b="0">
+                <a:solidFill>
+                  <a:srgbClr val="334155"/>
+                </a:solidFill>
+                <a:latin typeface="Segoe UI"/>
+              </a:rPr>
+              <a:t> Streams real-time Pulse Descriptor Words (PDWs), threat angle-of-arrival, and Figures of Merit over WebSockets to a tactical 360° PPI radar scope.</a:t>
             </a:r>
           </a:p>
         </p:txBody>
       </p:sp>
       <p:pic>
         <p:nvPicPr>
-          <p:cNvPr id="11" name="Picture 10" descr="media_1789546160540.png"/>
+          <p:cNvPr id="11" name="Picture 10" descr="s2_workflow.png"/>
           <p:cNvPicPr>
             <a:picLocks noChangeAspect="1"/>
           </p:cNvPicPr>
           <p:nvPr/>
         </p:nvPicPr>
         <p:blipFill>
-          <a:blip r:embed="rId2"/>
+          <a:blip r:embed="rId3"/>
           <a:stretch>
             <a:fillRect/>
           </a:stretch>
         </p:blipFill>
         <p:spPr>
           <a:xfrm>
-            <a:off x="6400800" y="1463040"/>
-            <a:ext cx="5029200" cy="2560320"/>
+            <a:off x="6959600" y="1066800"/>
+            <a:ext cx="5080000" cy="2963333"/>
           </a:xfrm>
           <a:prstGeom prst="rect">
             <a:avLst/>
           </a:prstGeom>
         </p:spPr>
       </p:pic>
-      <p:sp>
-        <p:nvSpPr>
-          <p:cNvPr id="12" name="Rounded Rectangle 11"/>
-          <p:cNvSpPr/>
+      <p:pic>
+        <p:nvPicPr>
+          <p:cNvPr id="12" name="Picture 11" descr="s2_innovation.png"/>
+          <p:cNvPicPr>
+            <a:picLocks noChangeAspect="1"/>
+          </p:cNvPicPr>
           <p:nvPr/>
-        </p:nvSpPr>
-        <p:spPr>
-          <a:xfrm>
-            <a:off x="6400800" y="4160520"/>
-            <a:ext cx="932688" cy="1965960"/>
-          </a:xfrm>
-          <a:prstGeom prst="roundRect">
+        </p:nvPicPr>
+        <p:blipFill>
+          <a:blip r:embed="rId4"/>
+          <a:stretch>
+            <a:fillRect/>
+          </a:stretch>
+        </p:blipFill>
+        <p:spPr>
+          <a:xfrm>
+            <a:off x="7027333" y="4097866"/>
+            <a:ext cx="5012266" cy="2065866"/>
+          </a:xfrm>
+          <a:prstGeom prst="rect">
             <a:avLst/>
           </a:prstGeom>
-          <a:solidFill>
-            <a:srgbClr val="FFFFFF"/>
-          </a:solidFill>
-          <a:ln w="19050">
-            <a:solidFill>
-              <a:srgbClr val="10A05A"/>
-            </a:solidFill>
-          </a:ln>
-        </p:spPr>
-        <p:style>
-          <a:lnRef idx="1">
-            <a:schemeClr val="accent1"/>
-          </a:lnRef>
-          <a:fillRef idx="3">
-            <a:schemeClr val="accent1"/>
-          </a:fillRef>
-          <a:effectRef idx="2">
-            <a:schemeClr val="accent1"/>
-          </a:effectRef>
-          <a:fontRef idx="minor">
-            <a:schemeClr val="lt1"/>
-          </a:fontRef>
-        </p:style>
-        <p:txBody>
-          <a:bodyPr rtlCol="0" anchor="ctr" wrap="square" lIns="36576" rIns="36576" tIns="73152"/>
-          <a:lstStyle/>
-          <a:p>
-            <a:pPr algn="ctr">
-              <a:spcAft>
-                <a:spcPts val="400"/>
-              </a:spcAft>
-              <a:defRPr sz="900" b="1">
-                <a:solidFill>
-                  <a:srgbClr val="10A05A"/>
-                </a:solidFill>
-                <a:latin typeface="Arial"/>
-              </a:defRPr>
-            </a:pPr>
-            <a:r>
-              <a:t>Deep Q-Network Policy</a:t>
-            </a:r>
-          </a:p>
-          <a:p>
-            <a:pPr>
-              <a:defRPr sz="750">
-                <a:solidFill>
-                  <a:srgbClr val="505F6E"/>
-                </a:solidFill>
-                <a:latin typeface="Arial"/>
-              </a:defRPr>
-            </a:pPr>
-            <a:r>
-              <a:t>Reinforcement learning achieves +32.36 reward (vs +10.20 baseline) and 97.3% sustained hit rate.</a:t>
-            </a:r>
-          </a:p>
-        </p:txBody>
-      </p:sp>
-      <p:sp>
-        <p:nvSpPr>
-          <p:cNvPr id="13" name="Rounded Rectangle 12"/>
-          <p:cNvSpPr/>
-          <p:nvPr/>
-        </p:nvSpPr>
-        <p:spPr>
-          <a:xfrm>
-            <a:off x="7406640" y="4160520"/>
-            <a:ext cx="932688" cy="1965960"/>
-          </a:xfrm>
-          <a:prstGeom prst="roundRect">
-            <a:avLst/>
-          </a:prstGeom>
-          <a:solidFill>
-            <a:srgbClr val="FFFFFF"/>
-          </a:solidFill>
-          <a:ln w="19050">
-            <a:solidFill>
-              <a:srgbClr val="1B56AC"/>
-            </a:solidFill>
-          </a:ln>
-        </p:spPr>
-        <p:style>
-          <a:lnRef idx="1">
-            <a:schemeClr val="accent1"/>
-          </a:lnRef>
-          <a:fillRef idx="3">
-            <a:schemeClr val="accent1"/>
-          </a:fillRef>
-          <a:effectRef idx="2">
-            <a:schemeClr val="accent1"/>
-          </a:effectRef>
-          <a:fontRef idx="minor">
-            <a:schemeClr val="lt1"/>
-          </a:fontRef>
-        </p:style>
-        <p:txBody>
-          <a:bodyPr rtlCol="0" anchor="ctr" wrap="square" lIns="36576" rIns="36576" tIns="73152"/>
-          <a:lstStyle/>
-          <a:p>
-            <a:pPr algn="ctr">
-              <a:spcAft>
-                <a:spcPts val="400"/>
-              </a:spcAft>
-              <a:defRPr sz="900" b="1">
-                <a:solidFill>
-                  <a:srgbClr val="1B56AC"/>
-                </a:solidFill>
-                <a:latin typeface="Arial"/>
-              </a:defRPr>
-            </a:pPr>
-            <a:r>
-              <a:t>Discounted UCB &amp; EXP3</a:t>
-            </a:r>
-          </a:p>
-          <a:p>
-            <a:pPr>
-              <a:defRPr sz="750">
-                <a:solidFill>
-                  <a:srgbClr val="505F6E"/>
-                </a:solidFill>
-                <a:latin typeface="Arial"/>
-              </a:defRPr>
-            </a:pPr>
-            <a:r>
-              <a:t>Adapts to agile hopping threats without pre-mission data; doubles intercept rate to 33.6 pulses/sec.</a:t>
-            </a:r>
-          </a:p>
-        </p:txBody>
-      </p:sp>
-      <p:sp>
-        <p:nvSpPr>
-          <p:cNvPr id="14" name="Rounded Rectangle 13"/>
-          <p:cNvSpPr/>
-          <p:nvPr/>
-        </p:nvSpPr>
-        <p:spPr>
-          <a:xfrm>
-            <a:off x="8412480" y="4160520"/>
-            <a:ext cx="932688" cy="1965960"/>
-          </a:xfrm>
-          <a:prstGeom prst="roundRect">
-            <a:avLst/>
-          </a:prstGeom>
-          <a:solidFill>
-            <a:srgbClr val="FFFFFF"/>
-          </a:solidFill>
-          <a:ln w="19050">
-            <a:solidFill>
-              <a:srgbClr val="E6641E"/>
-            </a:solidFill>
-          </a:ln>
-        </p:spPr>
-        <p:style>
-          <a:lnRef idx="1">
-            <a:schemeClr val="accent1"/>
-          </a:lnRef>
-          <a:fillRef idx="3">
-            <a:schemeClr val="accent1"/>
-          </a:fillRef>
-          <a:effectRef idx="2">
-            <a:schemeClr val="accent1"/>
-          </a:effectRef>
-          <a:fontRef idx="minor">
-            <a:schemeClr val="lt1"/>
-          </a:fontRef>
-        </p:style>
-        <p:txBody>
-          <a:bodyPr rtlCol="0" anchor="ctr" wrap="square" lIns="36576" rIns="36576" tIns="73152"/>
-          <a:lstStyle/>
-          <a:p>
-            <a:pPr algn="ctr">
-              <a:spcAft>
-                <a:spcPts val="400"/>
-              </a:spcAft>
-              <a:defRPr sz="900" b="1">
-                <a:solidFill>
-                  <a:srgbClr val="E6641E"/>
-                </a:solidFill>
-                <a:latin typeface="Arial"/>
-              </a:defRPr>
-            </a:pPr>
-            <a:r>
-              <a:t>Anti-Stroboscopic Scan</a:t>
-            </a:r>
-          </a:p>
-          <a:p>
-            <a:pPr>
-              <a:defRPr sz="750">
-                <a:solidFill>
-                  <a:srgbClr val="505F6E"/>
-                </a:solidFill>
-                <a:latin typeface="Arial"/>
-              </a:defRPr>
-            </a:pPr>
-            <a:r>
-              <a:t>Prime-staggered non-harmonic dwell sweep eliminates periodic stroboscopic radar blind spots.</a:t>
-            </a:r>
-          </a:p>
-        </p:txBody>
-      </p:sp>
-      <p:sp>
-        <p:nvSpPr>
-          <p:cNvPr id="15" name="Rounded Rectangle 14"/>
-          <p:cNvSpPr/>
-          <p:nvPr/>
-        </p:nvSpPr>
-        <p:spPr>
-          <a:xfrm>
-            <a:off x="9418320" y="4160520"/>
-            <a:ext cx="932688" cy="1965960"/>
-          </a:xfrm>
-          <a:prstGeom prst="roundRect">
-            <a:avLst/>
-          </a:prstGeom>
-          <a:solidFill>
-            <a:srgbClr val="FFFFFF"/>
-          </a:solidFill>
-          <a:ln w="19050">
-            <a:solidFill>
-              <a:srgbClr val="00A8CC"/>
-            </a:solidFill>
-          </a:ln>
-        </p:spPr>
-        <p:style>
-          <a:lnRef idx="1">
-            <a:schemeClr val="accent1"/>
-          </a:lnRef>
-          <a:fillRef idx="3">
-            <a:schemeClr val="accent1"/>
-          </a:fillRef>
-          <a:effectRef idx="2">
-            <a:schemeClr val="accent1"/>
-          </a:effectRef>
-          <a:fontRef idx="minor">
-            <a:schemeClr val="lt1"/>
-          </a:fontRef>
-        </p:style>
-        <p:txBody>
-          <a:bodyPr rtlCol="0" anchor="ctr" wrap="square" lIns="36576" rIns="36576" tIns="73152"/>
-          <a:lstStyle/>
-          <a:p>
-            <a:pPr algn="ctr">
-              <a:spcAft>
-                <a:spcPts val="400"/>
-              </a:spcAft>
-              <a:defRPr sz="900" b="1">
-                <a:solidFill>
-                  <a:srgbClr val="00A8CC"/>
-                </a:solidFill>
-                <a:latin typeface="Arial"/>
-              </a:defRPr>
-            </a:pPr>
-            <a:r>
-              <a:t>38ms Lookahead Accuracy</a:t>
-            </a:r>
-          </a:p>
-          <a:p>
-            <a:pPr>
-              <a:defRPr sz="750">
-                <a:solidFill>
-                  <a:srgbClr val="505F6E"/>
-                </a:solidFill>
-                <a:latin typeface="Arial"/>
-              </a:defRPr>
-            </a:pPr>
-            <a:r>
-              <a:t>Predicts arrival of rotating radar beams with sub-40ms temporal error, preempting dwells.</a:t>
-            </a:r>
-          </a:p>
-        </p:txBody>
-      </p:sp>
-      <p:sp>
-        <p:nvSpPr>
-          <p:cNvPr id="16" name="Rounded Rectangle 15"/>
-          <p:cNvSpPr/>
-          <p:nvPr/>
-        </p:nvSpPr>
-        <p:spPr>
-          <a:xfrm>
-            <a:off x="10424160" y="4160520"/>
-            <a:ext cx="932688" cy="1965960"/>
-          </a:xfrm>
-          <a:prstGeom prst="roundRect">
-            <a:avLst/>
-          </a:prstGeom>
-          <a:solidFill>
-            <a:srgbClr val="FFFFFF"/>
-          </a:solidFill>
-          <a:ln w="19050">
-            <a:solidFill>
-              <a:srgbClr val="102C57"/>
-            </a:solidFill>
-          </a:ln>
-        </p:spPr>
-        <p:style>
-          <a:lnRef idx="1">
-            <a:schemeClr val="accent1"/>
-          </a:lnRef>
-          <a:fillRef idx="3">
-            <a:schemeClr val="accent1"/>
-          </a:fillRef>
-          <a:effectRef idx="2">
-            <a:schemeClr val="accent1"/>
-          </a:effectRef>
-          <a:fontRef idx="minor">
-            <a:schemeClr val="lt1"/>
-          </a:fontRef>
-        </p:style>
-        <p:txBody>
-          <a:bodyPr rtlCol="0" anchor="ctr" wrap="square" lIns="36576" rIns="36576" tIns="73152"/>
-          <a:lstStyle/>
-          <a:p>
-            <a:pPr algn="ctr">
-              <a:spcAft>
-                <a:spcPts val="400"/>
-              </a:spcAft>
-              <a:defRPr sz="900" b="1">
-                <a:solidFill>
-                  <a:srgbClr val="102C57"/>
-                </a:solidFill>
-                <a:latin typeface="Arial"/>
-              </a:defRPr>
-            </a:pPr>
-            <a:r>
-              <a:t>360 PPI Scope &amp; Audio</a:t>
-            </a:r>
-          </a:p>
-          <a:p>
-            <a:pPr>
-              <a:defRPr sz="750">
-                <a:solidFill>
-                  <a:srgbClr val="505F6E"/>
-                </a:solidFill>
-                <a:latin typeface="Arial"/>
-              </a:defRPr>
-            </a:pPr>
-            <a:r>
-              <a:t>Decodes Pulse Descriptor Words (PDW) in real time with Angle of Arrival and radar audio sonification.</a:t>
-            </a:r>
-          </a:p>
-        </p:txBody>
-      </p:sp>
+        </p:spPr>
+      </p:pic>
     </p:spTree>
   </p:cSld>
   <p:clrMapOvr>
@@ -4613,99 +4086,49 @@
         <p:nvPr/>
       </p:nvGrpSpPr>
       <p:grpSpPr/>
-      <p:sp>
-        <p:nvSpPr>
-          <p:cNvPr id="2" name="TextBox 1"/>
-          <p:cNvSpPr txBox="1"/>
+      <p:pic>
+        <p:nvPicPr>
+          <p:cNvPr id="2" name="Picture 1" descr="sih_logo_clean.png"/>
+          <p:cNvPicPr>
+            <a:picLocks noChangeAspect="1"/>
+          </p:cNvPicPr>
           <p:nvPr/>
-        </p:nvSpPr>
-        <p:spPr>
-          <a:xfrm>
-            <a:off x="731520" y="228600"/>
-            <a:ext cx="7315200" cy="365760"/>
+        </p:nvPicPr>
+        <p:blipFill>
+          <a:blip r:embed="rId2"/>
+          <a:stretch>
+            <a:fillRect/>
+          </a:stretch>
+        </p:blipFill>
+        <p:spPr>
+          <a:xfrm>
+            <a:off x="9821333" y="127000"/>
+            <a:ext cx="2116666" cy="914400"/>
           </a:xfrm>
           <a:prstGeom prst="rect">
             <a:avLst/>
           </a:prstGeom>
-          <a:noFill/>
-        </p:spPr>
-        <p:txBody>
-          <a:bodyPr wrap="square">
-            <a:spAutoFit/>
-          </a:bodyPr>
-          <a:lstStyle/>
-          <a:p>
-            <a:pPr>
-              <a:defRPr sz="1400" b="1">
-                <a:solidFill>
-                  <a:srgbClr val="102C57"/>
-                </a:solidFill>
-                <a:latin typeface="Georgia"/>
-              </a:defRPr>
-            </a:pPr>
-            <a:r>
-              <a:t>SMART INDIA HACKATHON 2026</a:t>
-            </a:r>
-          </a:p>
-        </p:txBody>
-      </p:sp>
-      <p:sp>
-        <p:nvSpPr>
-          <p:cNvPr id="3" name="TextBox 2"/>
-          <p:cNvSpPr txBox="1"/>
+        </p:spPr>
+      </p:pic>
+      <p:sp>
+        <p:nvSpPr>
+          <p:cNvPr id="3" name="Rectangle 2"/>
+          <p:cNvSpPr/>
           <p:nvPr/>
         </p:nvSpPr>
         <p:spPr>
           <a:xfrm>
-            <a:off x="9601200" y="182880"/>
-            <a:ext cx="2011680" cy="457200"/>
+            <a:off x="0" y="6299200"/>
+            <a:ext cx="12192000" cy="558800"/>
           </a:xfrm>
           <a:prstGeom prst="rect">
             <a:avLst/>
           </a:prstGeom>
-          <a:noFill/>
-        </p:spPr>
-        <p:txBody>
-          <a:bodyPr wrap="none">
-            <a:spAutoFit/>
-          </a:bodyPr>
-          <a:lstStyle/>
-          <a:p>
-            <a:pPr algn="r">
-              <a:defRPr sz="1100" b="1">
-                <a:solidFill>
-                  <a:srgbClr val="1B56AC"/>
-                </a:solidFill>
-                <a:latin typeface="Arial"/>
-              </a:defRPr>
-            </a:pPr>
-            <a:r>
-              <a:t>SIH 2026 // DRDO</a:t>
-            </a:r>
-          </a:p>
-        </p:txBody>
-      </p:sp>
-      <p:sp>
-        <p:nvSpPr>
-          <p:cNvPr id="4" name="Rounded Rectangle 3"/>
-          <p:cNvSpPr/>
-          <p:nvPr/>
-        </p:nvSpPr>
-        <p:spPr>
-          <a:xfrm>
-            <a:off x="731520" y="640080"/>
-            <a:ext cx="1371600" cy="320040"/>
-          </a:xfrm>
-          <a:prstGeom prst="roundRect">
-            <a:avLst/>
-          </a:prstGeom>
           <a:solidFill>
-            <a:srgbClr val="FFFFFF"/>
+            <a:srgbClr val="0B5394"/>
           </a:solidFill>
-          <a:ln w="12700">
-            <a:solidFill>
-              <a:srgbClr val="D7E1EB"/>
-            </a:solidFill>
+          <a:ln>
+            <a:noFill/>
           </a:ln>
         </p:spPr>
         <p:style>
@@ -4726,30 +4149,20 @@
           <a:bodyPr rtlCol="0" anchor="ctr"/>
           <a:lstStyle/>
           <a:p>
-            <a:pPr algn="ctr">
-              <a:defRPr sz="1100" b="1">
-                <a:solidFill>
-                  <a:srgbClr val="191E24"/>
-                </a:solidFill>
-                <a:latin typeface="Arial"/>
-              </a:defRPr>
-            </a:pPr>
-            <a:r>
-              <a:t>numenors</a:t>
-            </a:r>
-          </a:p>
-        </p:txBody>
-      </p:sp>
-      <p:sp>
-        <p:nvSpPr>
-          <p:cNvPr id="5" name="TextBox 4"/>
+            <a:pPr algn="ctr"/>
+          </a:p>
+        </p:txBody>
+      </p:sp>
+      <p:sp>
+        <p:nvSpPr>
+          <p:cNvPr id="4" name="TextBox 3"/>
           <p:cNvSpPr txBox="1"/>
           <p:nvPr/>
         </p:nvSpPr>
         <p:spPr>
           <a:xfrm>
-            <a:off x="2286000" y="548640"/>
-            <a:ext cx="7315200" cy="548640"/>
+            <a:off x="2540000" y="6316133"/>
+            <a:ext cx="7112000" cy="508000"/>
           </a:xfrm>
           <a:prstGeom prst="rect">
             <a:avLst/>
@@ -4757,44 +4170,82 @@
           <a:noFill/>
         </p:spPr>
         <p:txBody>
+          <a:bodyPr wrap="square">
+            <a:spAutoFit/>
+          </a:bodyPr>
+          <a:lstStyle/>
+          <a:p>
+            <a:pPr algn="ctr">
+              <a:defRPr sz="1700" b="1">
+                <a:solidFill>
+                  <a:srgbClr val="FFFFFF"/>
+                </a:solidFill>
+                <a:latin typeface="Georgia"/>
+              </a:defRPr>
+            </a:pPr>
+            <a:r>
+              <a:t>SMART INDIA HACKATHON 2026</a:t>
+            </a:r>
+          </a:p>
+        </p:txBody>
+      </p:sp>
+      <p:sp>
+        <p:nvSpPr>
+          <p:cNvPr id="5" name="TextBox 4"/>
+          <p:cNvSpPr txBox="1"/>
+          <p:nvPr/>
+        </p:nvSpPr>
+        <p:spPr>
+          <a:xfrm>
+            <a:off x="11176000" y="6316133"/>
+            <a:ext cx="846666" cy="508000"/>
+          </a:xfrm>
+          <a:prstGeom prst="rect">
+            <a:avLst/>
+          </a:prstGeom>
+          <a:noFill/>
+        </p:spPr>
+        <p:txBody>
           <a:bodyPr wrap="none">
             <a:spAutoFit/>
           </a:bodyPr>
           <a:lstStyle/>
           <a:p>
-            <a:pPr>
-              <a:defRPr sz="2200" b="1">
-                <a:solidFill>
-                  <a:srgbClr val="191E24"/>
-                </a:solidFill>
-                <a:latin typeface="Georgia"/>
+            <a:pPr algn="r">
+              <a:defRPr sz="1700" b="1">
+                <a:solidFill>
+                  <a:srgbClr val="FFFFFF"/>
+                </a:solidFill>
+                <a:latin typeface="Arial"/>
               </a:defRPr>
             </a:pPr>
             <a:r>
-              <a:t>TECHNICAL APPROACH</a:t>
-            </a:r>
-          </a:p>
-        </p:txBody>
-      </p:sp>
-      <p:sp>
-        <p:nvSpPr>
-          <p:cNvPr id="6" name="Rectangle 5"/>
+              <a:t>3</a:t>
+            </a:r>
+          </a:p>
+        </p:txBody>
+      </p:sp>
+      <p:sp>
+        <p:nvSpPr>
+          <p:cNvPr id="6" name="Oval 5"/>
           <p:cNvSpPr/>
           <p:nvPr/>
         </p:nvSpPr>
         <p:spPr>
           <a:xfrm>
-            <a:off x="0" y="6492240"/>
-            <a:ext cx="12191695" cy="365760"/>
-          </a:xfrm>
-          <a:prstGeom prst="rect">
+            <a:off x="270933" y="237066"/>
+            <a:ext cx="1439333" cy="660400"/>
+          </a:xfrm>
+          <a:prstGeom prst="ellipse">
             <a:avLst/>
           </a:prstGeom>
           <a:solidFill>
-            <a:srgbClr val="102C57"/>
+            <a:srgbClr val="FFFFFF"/>
           </a:solidFill>
-          <a:ln>
-            <a:noFill/>
+          <a:ln w="31750">
+            <a:solidFill>
+              <a:srgbClr val="5E35B1"/>
+            </a:solidFill>
           </a:ln>
         </p:spPr>
         <p:style>
@@ -4812,19 +4263,19 @@
           </a:fontRef>
         </p:style>
         <p:txBody>
-          <a:bodyPr rtlCol="0" anchor="ctr"/>
+          <a:bodyPr rtlCol="0" anchor="ctr" wrap="none" lIns="0" rIns="0" tIns="0" bIns="0"/>
           <a:lstStyle/>
           <a:p>
             <a:pPr algn="ctr">
-              <a:defRPr sz="1000">
-                <a:solidFill>
-                  <a:srgbClr val="FFFFFF"/>
-                </a:solidFill>
-                <a:latin typeface="Arial"/>
+              <a:defRPr sz="2100" b="1">
+                <a:solidFill>
+                  <a:srgbClr val="141414"/>
+                </a:solidFill>
+                <a:latin typeface="Calibri"/>
               </a:defRPr>
             </a:pPr>
             <a:r>
-              <a:t>SMART INDIA HACKATHON 2026</a:t>
+              <a:t>numenors</a:t>
             </a:r>
           </a:p>
         </p:txBody>
@@ -4837,8 +4288,8 @@
         </p:nvSpPr>
         <p:spPr>
           <a:xfrm>
-            <a:off x="11430000" y="6492240"/>
-            <a:ext cx="548640" cy="365760"/>
+            <a:off x="1693333" y="211666"/>
+            <a:ext cx="7958666" cy="592666"/>
           </a:xfrm>
           <a:prstGeom prst="rect">
             <a:avLst/>
@@ -4851,886 +4302,92 @@
           </a:bodyPr>
           <a:lstStyle/>
           <a:p>
-            <a:pPr algn="r">
-              <a:defRPr sz="1000" b="1">
-                <a:solidFill>
-                  <a:srgbClr val="FFFFFF"/>
-                </a:solidFill>
-                <a:latin typeface="Arial"/>
-              </a:defRPr>
-            </a:pPr>
-            <a:r>
-              <a:t>3</a:t>
-            </a:r>
-          </a:p>
-        </p:txBody>
-      </p:sp>
-      <p:sp>
-        <p:nvSpPr>
-          <p:cNvPr id="8" name="Rounded Rectangle 7"/>
-          <p:cNvSpPr/>
-          <p:nvPr/>
-        </p:nvSpPr>
-        <p:spPr>
-          <a:xfrm>
-            <a:off x="731520" y="1280160"/>
-            <a:ext cx="1965960" cy="2011680"/>
-          </a:xfrm>
-          <a:prstGeom prst="roundRect">
-            <a:avLst/>
-          </a:prstGeom>
-          <a:solidFill>
-            <a:srgbClr val="FFFFFF"/>
-          </a:solidFill>
-          <a:ln w="12700">
-            <a:solidFill>
-              <a:srgbClr val="D7E1EB"/>
-            </a:solidFill>
-          </a:ln>
-        </p:spPr>
-        <p:style>
-          <a:lnRef idx="1">
-            <a:schemeClr val="accent1"/>
-          </a:lnRef>
-          <a:fillRef idx="3">
-            <a:schemeClr val="accent1"/>
-          </a:fillRef>
-          <a:effectRef idx="2">
-            <a:schemeClr val="accent1"/>
-          </a:effectRef>
-          <a:fontRef idx="minor">
-            <a:schemeClr val="lt1"/>
-          </a:fontRef>
-        </p:style>
-        <p:txBody>
-          <a:bodyPr rtlCol="0" anchor="ctr" wrap="square" tIns="73152"/>
-          <a:lstStyle/>
-          <a:p>
             <a:pPr algn="ctr">
-              <a:spcAft>
-                <a:spcPts val="600"/>
-              </a:spcAft>
-              <a:defRPr sz="1050" b="1">
-                <a:solidFill>
-                  <a:srgbClr val="102C57"/>
-                </a:solidFill>
-                <a:latin typeface="Arial"/>
-              </a:defRPr>
-            </a:pPr>
-            <a:r>
-              <a:t>Zone 1</a:t>
-            </a:r>
-            <a:br/>
-            <a:r>
-              <a:t>RF Environment &amp; Emitters</a:t>
-            </a:r>
-          </a:p>
-          <a:p>
-            <a:pPr>
-              <a:defRPr sz="900">
-                <a:solidFill>
-                  <a:srgbClr val="191E24"/>
-                </a:solidFill>
-                <a:latin typeface="Arial"/>
-              </a:defRPr>
-            </a:pPr>
-            <a:r>
-              <a:t>- Rotating Radar G(theta, t)</a:t>
-            </a:r>
-          </a:p>
-          <a:p>
-            <a:pPr>
-              <a:defRPr sz="900">
-                <a:solidFill>
-                  <a:srgbClr val="191E24"/>
-                </a:solidFill>
-                <a:latin typeface="Arial"/>
-              </a:defRPr>
-            </a:pPr>
-            <a:r>
-              <a:t>- Frequency-Agile Hoppers</a:t>
-            </a:r>
-          </a:p>
-          <a:p>
-            <a:pPr>
-              <a:defRPr sz="900">
-                <a:solidFill>
-                  <a:srgbClr val="191E24"/>
-                </a:solidFill>
-                <a:latin typeface="Arial"/>
-              </a:defRPr>
-            </a:pPr>
-            <a:r>
-              <a:t>- Drone Telemetry Bursts</a:t>
-            </a:r>
-          </a:p>
-          <a:p>
-            <a:pPr>
-              <a:defRPr sz="900">
-                <a:solidFill>
-                  <a:srgbClr val="191E24"/>
-                </a:solidFill>
-                <a:latin typeface="Arial"/>
-              </a:defRPr>
-            </a:pPr>
-            <a:r>
-              <a:t>- Truth Matrix [T x N]</a:t>
-            </a:r>
-          </a:p>
-        </p:txBody>
-      </p:sp>
-      <p:sp>
-        <p:nvSpPr>
-          <p:cNvPr id="9" name="Rounded Rectangle 8"/>
-          <p:cNvSpPr/>
-          <p:nvPr/>
-        </p:nvSpPr>
-        <p:spPr>
-          <a:xfrm>
-            <a:off x="2834639" y="1280160"/>
-            <a:ext cx="1965960" cy="2011680"/>
-          </a:xfrm>
-          <a:prstGeom prst="roundRect">
-            <a:avLst/>
-          </a:prstGeom>
-          <a:solidFill>
-            <a:srgbClr val="FFFFFF"/>
-          </a:solidFill>
-          <a:ln w="12700">
-            <a:solidFill>
-              <a:srgbClr val="D7E1EB"/>
-            </a:solidFill>
-          </a:ln>
-        </p:spPr>
-        <p:style>
-          <a:lnRef idx="1">
-            <a:schemeClr val="accent1"/>
-          </a:lnRef>
-          <a:fillRef idx="3">
-            <a:schemeClr val="accent1"/>
-          </a:fillRef>
-          <a:effectRef idx="2">
-            <a:schemeClr val="accent1"/>
-          </a:effectRef>
-          <a:fontRef idx="minor">
-            <a:schemeClr val="lt1"/>
-          </a:fontRef>
-        </p:style>
-        <p:txBody>
-          <a:bodyPr rtlCol="0" anchor="ctr" wrap="square" tIns="73152"/>
-          <a:lstStyle/>
-          <a:p>
-            <a:pPr algn="ctr">
-              <a:spcAft>
-                <a:spcPts val="600"/>
-              </a:spcAft>
-              <a:defRPr sz="1050" b="1">
-                <a:solidFill>
-                  <a:srgbClr val="102C57"/>
-                </a:solidFill>
-                <a:latin typeface="Arial"/>
-              </a:defRPr>
-            </a:pPr>
-            <a:r>
-              <a:t>Zone 2</a:t>
-            </a:r>
-            <a:br/>
-            <a:r>
-              <a:t>Tunable ES Receiver</a:t>
-            </a:r>
-          </a:p>
-          <a:p>
-            <a:pPr>
-              <a:defRPr sz="900">
-                <a:solidFill>
-                  <a:srgbClr val="191E24"/>
-                </a:solidFill>
-                <a:latin typeface="Arial"/>
-              </a:defRPr>
-            </a:pPr>
-            <a:r>
-              <a:t>- IBW Constraint (1 of N)</a:t>
-            </a:r>
-          </a:p>
-          <a:p>
-            <a:pPr>
-              <a:defRPr sz="900">
-                <a:solidFill>
-                  <a:srgbClr val="191E24"/>
-                </a:solidFill>
-                <a:latin typeface="Arial"/>
-              </a:defRPr>
-            </a:pPr>
-            <a:r>
-              <a:t>- Thermal Noise (-95 dBm)</a:t>
-            </a:r>
-          </a:p>
-          <a:p>
-            <a:pPr>
-              <a:defRPr sz="900">
-                <a:solidFill>
-                  <a:srgbClr val="191E24"/>
-                </a:solidFill>
-                <a:latin typeface="Arial"/>
-              </a:defRPr>
-            </a:pPr>
-            <a:r>
-              <a:t>- Sensitivity (-85 dBm)</a:t>
-            </a:r>
-          </a:p>
-          <a:p>
-            <a:pPr>
-              <a:defRPr sz="900">
-                <a:solidFill>
-                  <a:srgbClr val="191E24"/>
-                </a:solidFill>
-                <a:latin typeface="Arial"/>
-              </a:defRPr>
-            </a:pPr>
-            <a:r>
-              <a:t>- Switching Delay Model</a:t>
-            </a:r>
-          </a:p>
-        </p:txBody>
-      </p:sp>
-      <p:sp>
-        <p:nvSpPr>
-          <p:cNvPr id="10" name="Rounded Rectangle 9"/>
-          <p:cNvSpPr/>
-          <p:nvPr/>
-        </p:nvSpPr>
-        <p:spPr>
-          <a:xfrm>
-            <a:off x="4937759" y="1280160"/>
-            <a:ext cx="1965960" cy="2011680"/>
-          </a:xfrm>
-          <a:prstGeom prst="roundRect">
-            <a:avLst/>
-          </a:prstGeom>
-          <a:solidFill>
-            <a:srgbClr val="FFFFFF"/>
-          </a:solidFill>
-          <a:ln w="19050">
-            <a:solidFill>
-              <a:srgbClr val="1B56AC"/>
-            </a:solidFill>
-          </a:ln>
-        </p:spPr>
-        <p:style>
-          <a:lnRef idx="1">
-            <a:schemeClr val="accent1"/>
-          </a:lnRef>
-          <a:fillRef idx="3">
-            <a:schemeClr val="accent1"/>
-          </a:fillRef>
-          <a:effectRef idx="2">
-            <a:schemeClr val="accent1"/>
-          </a:effectRef>
-          <a:fontRef idx="minor">
-            <a:schemeClr val="lt1"/>
-          </a:fontRef>
-        </p:style>
-        <p:txBody>
-          <a:bodyPr rtlCol="0" anchor="ctr" wrap="square" tIns="73152"/>
-          <a:lstStyle/>
-          <a:p>
-            <a:pPr algn="ctr">
-              <a:spcAft>
-                <a:spcPts val="600"/>
-              </a:spcAft>
-              <a:defRPr sz="1050" b="1">
-                <a:solidFill>
-                  <a:srgbClr val="102C57"/>
-                </a:solidFill>
-                <a:latin typeface="Arial"/>
-              </a:defRPr>
-            </a:pPr>
-            <a:r>
-              <a:t>Zone 3</a:t>
-            </a:r>
-            <a:br/>
-            <a:r>
-              <a:t>Smart ML Schedulers</a:t>
-            </a:r>
-          </a:p>
-          <a:p>
-            <a:pPr>
-              <a:defRPr sz="900">
-                <a:solidFill>
-                  <a:srgbClr val="191E24"/>
-                </a:solidFill>
-                <a:latin typeface="Arial"/>
-              </a:defRPr>
-            </a:pPr>
-            <a:r>
-              <a:t>- Deep Q-Network (PyTorch)</a:t>
-            </a:r>
-          </a:p>
-          <a:p>
-            <a:pPr>
-              <a:defRPr sz="900">
-                <a:solidFill>
-                  <a:srgbClr val="191E24"/>
-                </a:solidFill>
-                <a:latin typeface="Arial"/>
-              </a:defRPr>
-            </a:pPr>
-            <a:r>
-              <a:t>- Discounted UCB (gamma=0.90)</a:t>
-            </a:r>
-          </a:p>
-          <a:p>
-            <a:pPr>
-              <a:defRPr sz="900">
-                <a:solidFill>
-                  <a:srgbClr val="191E24"/>
-                </a:solidFill>
-                <a:latin typeface="Arial"/>
-              </a:defRPr>
-            </a:pPr>
-            <a:r>
-              <a:t>- EXP3 Adversarial MAB</a:t>
-            </a:r>
-          </a:p>
-          <a:p>
-            <a:pPr>
-              <a:defRPr sz="900">
-                <a:solidFill>
-                  <a:srgbClr val="191E24"/>
-                </a:solidFill>
-                <a:latin typeface="Arial"/>
-              </a:defRPr>
-            </a:pPr>
-            <a:r>
-              <a:t>- Predictive Interceptor</a:t>
-            </a:r>
-          </a:p>
-        </p:txBody>
-      </p:sp>
-      <p:sp>
-        <p:nvSpPr>
-          <p:cNvPr id="11" name="Rounded Rectangle 10"/>
-          <p:cNvSpPr/>
-          <p:nvPr/>
-        </p:nvSpPr>
-        <p:spPr>
-          <a:xfrm>
-            <a:off x="7040879" y="1280160"/>
-            <a:ext cx="1965960" cy="2011680"/>
-          </a:xfrm>
-          <a:prstGeom prst="roundRect">
-            <a:avLst/>
-          </a:prstGeom>
-          <a:solidFill>
-            <a:srgbClr val="FFFFFF"/>
-          </a:solidFill>
-          <a:ln w="12700">
-            <a:solidFill>
-              <a:srgbClr val="D7E1EB"/>
-            </a:solidFill>
-          </a:ln>
-        </p:spPr>
-        <p:style>
-          <a:lnRef idx="1">
-            <a:schemeClr val="accent1"/>
-          </a:lnRef>
-          <a:fillRef idx="3">
-            <a:schemeClr val="accent1"/>
-          </a:fillRef>
-          <a:effectRef idx="2">
-            <a:schemeClr val="accent1"/>
-          </a:effectRef>
-          <a:fontRef idx="minor">
-            <a:schemeClr val="lt1"/>
-          </a:fontRef>
-        </p:style>
-        <p:txBody>
-          <a:bodyPr rtlCol="0" anchor="ctr" wrap="square" tIns="73152"/>
-          <a:lstStyle/>
-          <a:p>
-            <a:pPr algn="ctr">
-              <a:spcAft>
-                <a:spcPts val="600"/>
-              </a:spcAft>
-              <a:defRPr sz="1050" b="1">
-                <a:solidFill>
-                  <a:srgbClr val="102C57"/>
-                </a:solidFill>
-                <a:latin typeface="Arial"/>
-              </a:defRPr>
-            </a:pPr>
-            <a:r>
-              <a:t>Zone 4</a:t>
-            </a:r>
-            <a:br/>
-            <a:r>
-              <a:t>DRDO FOMs &amp; C2 UI</a:t>
-            </a:r>
-          </a:p>
-          <a:p>
-            <a:pPr>
-              <a:defRPr sz="900">
-                <a:solidFill>
-                  <a:srgbClr val="191E24"/>
-                </a:solidFill>
-                <a:latin typeface="Arial"/>
-              </a:defRPr>
-            </a:pPr>
-            <a:r>
-              <a:t>- Pd, Pfa, MDS Sensitivity</a:t>
-            </a:r>
-          </a:p>
-          <a:p>
-            <a:pPr>
-              <a:defRPr sz="900">
-                <a:solidFill>
-                  <a:srgbClr val="191E24"/>
-                </a:solidFill>
-                <a:latin typeface="Arial"/>
-              </a:defRPr>
-            </a:pPr>
-            <a:r>
-              <a:t>- Intercept Rate &amp; Error</a:t>
-            </a:r>
-          </a:p>
-          <a:p>
-            <a:pPr>
-              <a:defRPr sz="900">
-                <a:solidFill>
-                  <a:srgbClr val="191E24"/>
-                </a:solidFill>
-                <a:latin typeface="Arial"/>
-              </a:defRPr>
-            </a:pPr>
-            <a:r>
-              <a:t>- 360 PPI Radar Scope</a:t>
-            </a:r>
-          </a:p>
-          <a:p>
-            <a:pPr>
-              <a:defRPr sz="900">
-                <a:solidFill>
-                  <a:srgbClr val="191E24"/>
-                </a:solidFill>
-                <a:latin typeface="Arial"/>
-              </a:defRPr>
-            </a:pPr>
-            <a:r>
-              <a:t>- Real-time 2D Waterfall</a:t>
-            </a:r>
-          </a:p>
-        </p:txBody>
-      </p:sp>
-      <p:sp>
-        <p:nvSpPr>
-          <p:cNvPr id="12" name="Rounded Rectangle 11"/>
-          <p:cNvSpPr/>
-          <p:nvPr/>
-        </p:nvSpPr>
-        <p:spPr>
-          <a:xfrm>
-            <a:off x="9235440" y="1280160"/>
-            <a:ext cx="2194560" cy="4754880"/>
-          </a:xfrm>
-          <a:prstGeom prst="roundRect">
-            <a:avLst/>
-          </a:prstGeom>
-          <a:solidFill>
-            <a:srgbClr val="FFFFFF"/>
-          </a:solidFill>
-          <a:ln w="19050">
-            <a:solidFill>
-              <a:srgbClr val="1B56AC"/>
-            </a:solidFill>
-          </a:ln>
-        </p:spPr>
-        <p:style>
-          <a:lnRef idx="1">
-            <a:schemeClr val="accent1"/>
-          </a:lnRef>
-          <a:fillRef idx="3">
-            <a:schemeClr val="accent1"/>
-          </a:fillRef>
-          <a:effectRef idx="2">
-            <a:schemeClr val="accent1"/>
-          </a:effectRef>
-          <a:fontRef idx="minor">
-            <a:schemeClr val="lt1"/>
-          </a:fontRef>
-        </p:style>
-        <p:txBody>
-          <a:bodyPr rtlCol="0" anchor="ctr" wrap="square" tIns="91440"/>
-          <a:lstStyle/>
-          <a:p>
-            <a:pPr algn="ctr">
-              <a:spcAft>
-                <a:spcPts val="800"/>
-              </a:spcAft>
-              <a:defRPr sz="1100" b="1">
-                <a:solidFill>
-                  <a:srgbClr val="102C57"/>
+              <a:defRPr sz="3600" b="1">
+                <a:solidFill>
+                  <a:srgbClr val="0F172A"/>
                 </a:solidFill>
                 <a:latin typeface="Georgia"/>
               </a:defRPr>
             </a:pPr>
             <a:r>
-              <a:t>IMPLEMENTATION PROCESS</a:t>
-            </a:r>
-          </a:p>
-          <a:p>
-            <a:pPr>
-              <a:defRPr sz="950" b="1">
-                <a:solidFill>
-                  <a:srgbClr val="1B56AC"/>
-                </a:solidFill>
-                <a:latin typeface="Arial"/>
-              </a:defRPr>
-            </a:pPr>
-            <a:r>
-              <a:t>1. RF Environment Model</a:t>
-            </a:r>
-          </a:p>
-          <a:p>
-            <a:pPr>
-              <a:spcAft>
-                <a:spcPts val="400"/>
-              </a:spcAft>
-              <a:defRPr sz="850">
-                <a:solidFill>
-                  <a:srgbClr val="505F6E"/>
-                </a:solidFill>
-                <a:latin typeface="Arial"/>
-              </a:defRPr>
-            </a:pPr>
-            <a:r>
-              <a:t>Simulates continuous multi-band emitter pulse streams &amp; antenna beams.</a:t>
-            </a:r>
-          </a:p>
-          <a:p>
-            <a:pPr>
-              <a:defRPr sz="950" b="1">
-                <a:solidFill>
-                  <a:srgbClr val="1B56AC"/>
-                </a:solidFill>
-                <a:latin typeface="Arial"/>
-              </a:defRPr>
-            </a:pPr>
-            <a:r>
-              <a:t>2. Receiver Dwell Engine</a:t>
-            </a:r>
-          </a:p>
-          <a:p>
-            <a:pPr>
-              <a:spcAft>
-                <a:spcPts val="400"/>
-              </a:spcAft>
-              <a:defRPr sz="850">
-                <a:solidFill>
-                  <a:srgbClr val="505F6E"/>
-                </a:solidFill>
-                <a:latin typeface="Arial"/>
-              </a:defRPr>
-            </a:pPr>
-            <a:r>
-              <a:t>Applies IBW constraints, noise floor, and sensitivity thresholding.</a:t>
-            </a:r>
-          </a:p>
-          <a:p>
-            <a:pPr>
-              <a:defRPr sz="950" b="1">
-                <a:solidFill>
-                  <a:srgbClr val="1B56AC"/>
-                </a:solidFill>
-                <a:latin typeface="Arial"/>
-              </a:defRPr>
-            </a:pPr>
-            <a:r>
-              <a:t>3. Closed-Loop Feedback</a:t>
-            </a:r>
-          </a:p>
-          <a:p>
-            <a:pPr>
-              <a:spcAft>
-                <a:spcPts val="400"/>
-              </a:spcAft>
-              <a:defRPr sz="850">
-                <a:solidFill>
-                  <a:srgbClr val="505F6E"/>
-                </a:solidFill>
-                <a:latin typeface="Arial"/>
-              </a:defRPr>
-            </a:pPr>
-            <a:r>
-              <a:t>Generates hit/miss/reward states based on threat priorities.</a:t>
-            </a:r>
-          </a:p>
-          <a:p>
-            <a:pPr>
-              <a:defRPr sz="950" b="1">
-                <a:solidFill>
-                  <a:srgbClr val="1B56AC"/>
-                </a:solidFill>
-                <a:latin typeface="Arial"/>
-              </a:defRPr>
-            </a:pPr>
-            <a:r>
-              <a:t>4. DQN &amp; Bandit Policy</a:t>
-            </a:r>
-          </a:p>
-          <a:p>
-            <a:pPr>
-              <a:spcAft>
-                <a:spcPts val="400"/>
-              </a:spcAft>
-              <a:defRPr sz="850">
-                <a:solidFill>
-                  <a:srgbClr val="505F6E"/>
-                </a:solidFill>
-                <a:latin typeface="Arial"/>
-              </a:defRPr>
-            </a:pPr>
-            <a:r>
-              <a:t>Trains online neural policy and non-stationary bandit confidence indices.</a:t>
-            </a:r>
-          </a:p>
-          <a:p>
-            <a:pPr>
-              <a:defRPr sz="950" b="1">
-                <a:solidFill>
-                  <a:srgbClr val="1B56AC"/>
-                </a:solidFill>
-                <a:latin typeface="Arial"/>
-              </a:defRPr>
-            </a:pPr>
-            <a:r>
-              <a:t>5. Lookahead Interceptor</a:t>
-            </a:r>
-          </a:p>
-          <a:p>
-            <a:pPr>
-              <a:spcAft>
-                <a:spcPts val="400"/>
-              </a:spcAft>
-              <a:defRPr sz="850">
-                <a:solidFill>
-                  <a:srgbClr val="505F6E"/>
-                </a:solidFill>
-                <a:latin typeface="Arial"/>
-              </a:defRPr>
-            </a:pPr>
-            <a:r>
-              <a:t>Estimates emitter scan periods and schedules proactive dwells.</a:t>
-            </a:r>
-          </a:p>
-          <a:p>
-            <a:pPr>
-              <a:defRPr sz="950" b="1">
-                <a:solidFill>
-                  <a:srgbClr val="1B56AC"/>
-                </a:solidFill>
-                <a:latin typeface="Arial"/>
-              </a:defRPr>
-            </a:pPr>
-            <a:r>
-              <a:t>6. Tactical C2 Telemetry</a:t>
-            </a:r>
-          </a:p>
-          <a:p>
-            <a:pPr>
-              <a:spcAft>
-                <a:spcPts val="400"/>
-              </a:spcAft>
-              <a:defRPr sz="850">
-                <a:solidFill>
-                  <a:srgbClr val="505F6E"/>
-                </a:solidFill>
-                <a:latin typeface="Arial"/>
-              </a:defRPr>
-            </a:pPr>
-            <a:r>
-              <a:t>Streams live 2D waterfall, 360 PPI, and DRDO figures of merit.</a:t>
-            </a:r>
-          </a:p>
-        </p:txBody>
-      </p:sp>
-      <p:sp>
-        <p:nvSpPr>
-          <p:cNvPr id="13" name="Rounded Rectangle 12"/>
-          <p:cNvSpPr/>
+              <a:t>TECHNICAL APPROACH</a:t>
+            </a:r>
+          </a:p>
+        </p:txBody>
+      </p:sp>
+      <p:pic>
+        <p:nvPicPr>
+          <p:cNvPr id="8" name="Picture 7" descr="s3_zones.png"/>
+          <p:cNvPicPr>
+            <a:picLocks noChangeAspect="1"/>
+          </p:cNvPicPr>
           <p:nvPr/>
-        </p:nvSpPr>
-        <p:spPr>
-          <a:xfrm>
-            <a:off x="731520" y="3474720"/>
-            <a:ext cx="8229600" cy="2560320"/>
-          </a:xfrm>
-          <a:prstGeom prst="roundRect">
+        </p:nvPicPr>
+        <p:blipFill>
+          <a:blip r:embed="rId3"/>
+          <a:stretch>
+            <a:fillRect/>
+          </a:stretch>
+        </p:blipFill>
+        <p:spPr>
+          <a:xfrm>
+            <a:off x="203200" y="982133"/>
+            <a:ext cx="8043333" cy="4419600"/>
+          </a:xfrm>
+          <a:prstGeom prst="rect">
             <a:avLst/>
           </a:prstGeom>
-          <a:solidFill>
-            <a:srgbClr val="FFFFFF"/>
-          </a:solidFill>
-          <a:ln w="12700">
-            <a:solidFill>
-              <a:srgbClr val="D7E1EB"/>
-            </a:solidFill>
-          </a:ln>
-        </p:spPr>
-        <p:style>
-          <a:lnRef idx="1">
-            <a:schemeClr val="accent1"/>
-          </a:lnRef>
-          <a:fillRef idx="3">
-            <a:schemeClr val="accent1"/>
-          </a:fillRef>
-          <a:effectRef idx="2">
-            <a:schemeClr val="accent1"/>
-          </a:effectRef>
-          <a:fontRef idx="minor">
-            <a:schemeClr val="lt1"/>
-          </a:fontRef>
-        </p:style>
-        <p:txBody>
-          <a:bodyPr rtlCol="0" anchor="ctr" wrap="square"/>
-          <a:lstStyle/>
-          <a:p>
-            <a:pPr algn="ctr">
-              <a:spcAft>
-                <a:spcPts val="800"/>
-              </a:spcAft>
-              <a:defRPr sz="1200" b="1">
-                <a:solidFill>
-                  <a:srgbClr val="102C57"/>
-                </a:solidFill>
-                <a:latin typeface="Georgia"/>
-              </a:defRPr>
-            </a:pPr>
-            <a:r>
-              <a:t>COMPONENTS &amp; TECHNOLOGY STACK</a:t>
-            </a:r>
-          </a:p>
-          <a:p>
-            <a:r>
-              <a:rPr sz="1000" b="1">
-                <a:solidFill>
-                  <a:srgbClr val="1B56AC"/>
-                </a:solidFill>
-                <a:latin typeface="Arial"/>
-              </a:rPr>
-              <a:t>- Python 3.8+: </a:t>
-            </a:r>
-            <a:r>
-              <a:rPr sz="1000">
-                <a:solidFill>
-                  <a:srgbClr val="191E24"/>
-                </a:solidFill>
-                <a:latin typeface="Arial"/>
-              </a:rPr>
-              <a:t>Core EW simulation &amp; receiver system models</a:t>
-            </a:r>
-          </a:p>
-          <a:p>
-            <a:r>
-              <a:rPr sz="1000" b="1">
-                <a:solidFill>
-                  <a:srgbClr val="1B56AC"/>
-                </a:solidFill>
-                <a:latin typeface="Arial"/>
-              </a:rPr>
-              <a:t>- PyTorch 2.4: </a:t>
-            </a:r>
-            <a:r>
-              <a:rPr sz="1000">
-                <a:solidFill>
-                  <a:srgbClr val="191E24"/>
-                </a:solidFill>
-                <a:latin typeface="Arial"/>
-              </a:rPr>
-              <a:t>Deep Q-Network (DQN) policy training &amp; experience replay</a:t>
-            </a:r>
-          </a:p>
-          <a:p>
-            <a:r>
-              <a:rPr sz="1000" b="1">
-                <a:solidFill>
-                  <a:srgbClr val="1B56AC"/>
-                </a:solidFill>
-                <a:latin typeface="Arial"/>
-              </a:rPr>
-              <a:t>- NumPy &amp; SciPy: </a:t>
-            </a:r>
-            <a:r>
-              <a:rPr sz="1000">
-                <a:solidFill>
-                  <a:srgbClr val="191E24"/>
-                </a:solidFill>
-                <a:latin typeface="Arial"/>
-              </a:rPr>
-              <a:t>Non-stationary bandit math (D-UCB, EXP3) &amp; period estimation</a:t>
-            </a:r>
-          </a:p>
-          <a:p>
-            <a:r>
-              <a:rPr sz="1000" b="1">
-                <a:solidFill>
-                  <a:srgbClr val="1B56AC"/>
-                </a:solidFill>
-                <a:latin typeface="Arial"/>
-              </a:rPr>
-              <a:t>- Turing Dataset / HDF5: </a:t>
-            </a:r>
-            <a:r>
-              <a:rPr sz="1000">
-                <a:solidFill>
-                  <a:srgbClr val="191E24"/>
-                </a:solidFill>
-                <a:latin typeface="Arial"/>
-              </a:rPr>
-              <a:t>20,628 synthetic radar PDWs &amp; official HF .h5 loader</a:t>
-            </a:r>
-          </a:p>
-          <a:p>
-            <a:r>
-              <a:rPr sz="1000" b="1">
-                <a:solidFill>
-                  <a:srgbClr val="1B56AC"/>
-                </a:solidFill>
-                <a:latin typeface="Arial"/>
-              </a:rPr>
-              <a:t>- WebSockets &amp; AsyncIO: </a:t>
-            </a:r>
-            <a:r>
-              <a:rPr sz="1000">
-                <a:solidFill>
-                  <a:srgbClr val="191E24"/>
-                </a:solidFill>
-                <a:latin typeface="Arial"/>
-              </a:rPr>
-              <a:t>High-frequency 20Hz live telemetry broadcast server</a:t>
-            </a:r>
-          </a:p>
-          <a:p>
-            <a:r>
-              <a:rPr sz="1000" b="1">
-                <a:solidFill>
-                  <a:srgbClr val="1B56AC"/>
-                </a:solidFill>
-                <a:latin typeface="Arial"/>
-              </a:rPr>
-              <a:t>- HTML5 Canvas C2 HUD: </a:t>
-            </a:r>
-            <a:r>
-              <a:rPr sz="1000">
-                <a:solidFill>
-                  <a:srgbClr val="191E24"/>
-                </a:solidFill>
-                <a:latin typeface="Arial"/>
-              </a:rPr>
-              <a:t>360 PPI scope, 2D waterfall spectrogram, &amp; tactical audio FX</a:t>
-            </a:r>
-          </a:p>
-        </p:txBody>
-      </p:sp>
+        </p:spPr>
+      </p:pic>
+      <p:pic>
+        <p:nvPicPr>
+          <p:cNvPr id="9" name="Picture 8" descr="s3_techstack.png"/>
+          <p:cNvPicPr>
+            <a:picLocks noChangeAspect="1"/>
+          </p:cNvPicPr>
+          <p:nvPr/>
+        </p:nvPicPr>
+        <p:blipFill>
+          <a:blip r:embed="rId4"/>
+          <a:stretch>
+            <a:fillRect/>
+          </a:stretch>
+        </p:blipFill>
+        <p:spPr>
+          <a:xfrm>
+            <a:off x="203200" y="5435600"/>
+            <a:ext cx="8043333" cy="829733"/>
+          </a:xfrm>
+          <a:prstGeom prst="rect">
+            <a:avLst/>
+          </a:prstGeom>
+        </p:spPr>
+      </p:pic>
+      <p:pic>
+        <p:nvPicPr>
+          <p:cNvPr id="10" name="Picture 9" descr="s3_process.png"/>
+          <p:cNvPicPr>
+            <a:picLocks noChangeAspect="1"/>
+          </p:cNvPicPr>
+          <p:nvPr/>
+        </p:nvPicPr>
+        <p:blipFill>
+          <a:blip r:embed="rId5"/>
+          <a:stretch>
+            <a:fillRect/>
+          </a:stretch>
+        </p:blipFill>
+        <p:spPr>
+          <a:xfrm>
+            <a:off x="8382000" y="982133"/>
+            <a:ext cx="3598333" cy="5283200"/>
+          </a:xfrm>
+          <a:prstGeom prst="rect">
+            <a:avLst/>
+          </a:prstGeom>
+        </p:spPr>
+      </p:pic>
     </p:spTree>
   </p:cSld>
   <p:clrMapOvr>
@@ -5749,99 +4406,49 @@
         <p:nvPr/>
       </p:nvGrpSpPr>
       <p:grpSpPr/>
-      <p:sp>
-        <p:nvSpPr>
-          <p:cNvPr id="2" name="TextBox 1"/>
-          <p:cNvSpPr txBox="1"/>
+      <p:pic>
+        <p:nvPicPr>
+          <p:cNvPr id="2" name="Picture 1" descr="sih_logo_clean.png"/>
+          <p:cNvPicPr>
+            <a:picLocks noChangeAspect="1"/>
+          </p:cNvPicPr>
           <p:nvPr/>
-        </p:nvSpPr>
-        <p:spPr>
-          <a:xfrm>
-            <a:off x="731520" y="228600"/>
-            <a:ext cx="7315200" cy="365760"/>
+        </p:nvPicPr>
+        <p:blipFill>
+          <a:blip r:embed="rId2"/>
+          <a:stretch>
+            <a:fillRect/>
+          </a:stretch>
+        </p:blipFill>
+        <p:spPr>
+          <a:xfrm>
+            <a:off x="9821333" y="127000"/>
+            <a:ext cx="2116666" cy="914400"/>
           </a:xfrm>
           <a:prstGeom prst="rect">
             <a:avLst/>
           </a:prstGeom>
-          <a:noFill/>
-        </p:spPr>
-        <p:txBody>
-          <a:bodyPr wrap="square">
-            <a:spAutoFit/>
-          </a:bodyPr>
-          <a:lstStyle/>
-          <a:p>
-            <a:pPr>
-              <a:defRPr sz="1400" b="1">
-                <a:solidFill>
-                  <a:srgbClr val="102C57"/>
-                </a:solidFill>
-                <a:latin typeface="Georgia"/>
-              </a:defRPr>
-            </a:pPr>
-            <a:r>
-              <a:t>SMART INDIA HACKATHON 2026</a:t>
-            </a:r>
-          </a:p>
-        </p:txBody>
-      </p:sp>
-      <p:sp>
-        <p:nvSpPr>
-          <p:cNvPr id="3" name="TextBox 2"/>
-          <p:cNvSpPr txBox="1"/>
+        </p:spPr>
+      </p:pic>
+      <p:sp>
+        <p:nvSpPr>
+          <p:cNvPr id="3" name="Rectangle 2"/>
+          <p:cNvSpPr/>
           <p:nvPr/>
         </p:nvSpPr>
         <p:spPr>
           <a:xfrm>
-            <a:off x="9601200" y="182880"/>
-            <a:ext cx="2011680" cy="457200"/>
+            <a:off x="0" y="6299200"/>
+            <a:ext cx="12192000" cy="558800"/>
           </a:xfrm>
           <a:prstGeom prst="rect">
             <a:avLst/>
           </a:prstGeom>
-          <a:noFill/>
-        </p:spPr>
-        <p:txBody>
-          <a:bodyPr wrap="none">
-            <a:spAutoFit/>
-          </a:bodyPr>
-          <a:lstStyle/>
-          <a:p>
-            <a:pPr algn="r">
-              <a:defRPr sz="1100" b="1">
-                <a:solidFill>
-                  <a:srgbClr val="1B56AC"/>
-                </a:solidFill>
-                <a:latin typeface="Arial"/>
-              </a:defRPr>
-            </a:pPr>
-            <a:r>
-              <a:t>SIH 2026 // DRDO</a:t>
-            </a:r>
-          </a:p>
-        </p:txBody>
-      </p:sp>
-      <p:sp>
-        <p:nvSpPr>
-          <p:cNvPr id="4" name="Rounded Rectangle 3"/>
-          <p:cNvSpPr/>
-          <p:nvPr/>
-        </p:nvSpPr>
-        <p:spPr>
-          <a:xfrm>
-            <a:off x="731520" y="640080"/>
-            <a:ext cx="1371600" cy="320040"/>
-          </a:xfrm>
-          <a:prstGeom prst="roundRect">
-            <a:avLst/>
-          </a:prstGeom>
           <a:solidFill>
-            <a:srgbClr val="FFFFFF"/>
+            <a:srgbClr val="0B5394"/>
           </a:solidFill>
-          <a:ln w="12700">
-            <a:solidFill>
-              <a:srgbClr val="D7E1EB"/>
-            </a:solidFill>
+          <a:ln>
+            <a:noFill/>
           </a:ln>
         </p:spPr>
         <p:style>
@@ -5862,30 +4469,20 @@
           <a:bodyPr rtlCol="0" anchor="ctr"/>
           <a:lstStyle/>
           <a:p>
-            <a:pPr algn="ctr">
-              <a:defRPr sz="1100" b="1">
-                <a:solidFill>
-                  <a:srgbClr val="191E24"/>
-                </a:solidFill>
-                <a:latin typeface="Arial"/>
-              </a:defRPr>
-            </a:pPr>
-            <a:r>
-              <a:t>numenors</a:t>
-            </a:r>
-          </a:p>
-        </p:txBody>
-      </p:sp>
-      <p:sp>
-        <p:nvSpPr>
-          <p:cNvPr id="5" name="TextBox 4"/>
+            <a:pPr algn="ctr"/>
+          </a:p>
+        </p:txBody>
+      </p:sp>
+      <p:sp>
+        <p:nvSpPr>
+          <p:cNvPr id="4" name="TextBox 3"/>
           <p:cNvSpPr txBox="1"/>
           <p:nvPr/>
         </p:nvSpPr>
         <p:spPr>
           <a:xfrm>
-            <a:off x="2286000" y="548640"/>
-            <a:ext cx="7315200" cy="548640"/>
+            <a:off x="2540000" y="6316133"/>
+            <a:ext cx="7112000" cy="508000"/>
           </a:xfrm>
           <a:prstGeom prst="rect">
             <a:avLst/>
@@ -5893,44 +4490,82 @@
           <a:noFill/>
         </p:spPr>
         <p:txBody>
+          <a:bodyPr wrap="square">
+            <a:spAutoFit/>
+          </a:bodyPr>
+          <a:lstStyle/>
+          <a:p>
+            <a:pPr algn="ctr">
+              <a:defRPr sz="1700" b="1">
+                <a:solidFill>
+                  <a:srgbClr val="FFFFFF"/>
+                </a:solidFill>
+                <a:latin typeface="Georgia"/>
+              </a:defRPr>
+            </a:pPr>
+            <a:r>
+              <a:t>SMART INDIA HACKATHON 2026</a:t>
+            </a:r>
+          </a:p>
+        </p:txBody>
+      </p:sp>
+      <p:sp>
+        <p:nvSpPr>
+          <p:cNvPr id="5" name="TextBox 4"/>
+          <p:cNvSpPr txBox="1"/>
+          <p:nvPr/>
+        </p:nvSpPr>
+        <p:spPr>
+          <a:xfrm>
+            <a:off x="11176000" y="6316133"/>
+            <a:ext cx="846666" cy="508000"/>
+          </a:xfrm>
+          <a:prstGeom prst="rect">
+            <a:avLst/>
+          </a:prstGeom>
+          <a:noFill/>
+        </p:spPr>
+        <p:txBody>
           <a:bodyPr wrap="none">
             <a:spAutoFit/>
           </a:bodyPr>
           <a:lstStyle/>
           <a:p>
-            <a:pPr>
-              <a:defRPr sz="2200" b="1">
-                <a:solidFill>
-                  <a:srgbClr val="191E24"/>
-                </a:solidFill>
-                <a:latin typeface="Georgia"/>
+            <a:pPr algn="r">
+              <a:defRPr sz="1700" b="1">
+                <a:solidFill>
+                  <a:srgbClr val="FFFFFF"/>
+                </a:solidFill>
+                <a:latin typeface="Arial"/>
               </a:defRPr>
             </a:pPr>
             <a:r>
-              <a:t>FEASIBILITY AND VIABILITY</a:t>
-            </a:r>
-          </a:p>
-        </p:txBody>
-      </p:sp>
-      <p:sp>
-        <p:nvSpPr>
-          <p:cNvPr id="6" name="Rectangle 5"/>
+              <a:t>4</a:t>
+            </a:r>
+          </a:p>
+        </p:txBody>
+      </p:sp>
+      <p:sp>
+        <p:nvSpPr>
+          <p:cNvPr id="6" name="Oval 5"/>
           <p:cNvSpPr/>
           <p:nvPr/>
         </p:nvSpPr>
         <p:spPr>
           <a:xfrm>
-            <a:off x="0" y="6492240"/>
-            <a:ext cx="12191695" cy="365760"/>
-          </a:xfrm>
-          <a:prstGeom prst="rect">
+            <a:off x="270933" y="237066"/>
+            <a:ext cx="1439333" cy="660400"/>
+          </a:xfrm>
+          <a:prstGeom prst="ellipse">
             <a:avLst/>
           </a:prstGeom>
           <a:solidFill>
-            <a:srgbClr val="102C57"/>
+            <a:srgbClr val="FFFFFF"/>
           </a:solidFill>
-          <a:ln>
-            <a:noFill/>
+          <a:ln w="31750">
+            <a:solidFill>
+              <a:srgbClr val="5E35B1"/>
+            </a:solidFill>
           </a:ln>
         </p:spPr>
         <p:style>
@@ -5948,19 +4583,19 @@
           </a:fontRef>
         </p:style>
         <p:txBody>
-          <a:bodyPr rtlCol="0" anchor="ctr"/>
+          <a:bodyPr rtlCol="0" anchor="ctr" wrap="none" lIns="0" rIns="0" tIns="0" bIns="0"/>
           <a:lstStyle/>
           <a:p>
             <a:pPr algn="ctr">
-              <a:defRPr sz="1000">
-                <a:solidFill>
-                  <a:srgbClr val="FFFFFF"/>
-                </a:solidFill>
-                <a:latin typeface="Arial"/>
+              <a:defRPr sz="2100" b="1">
+                <a:solidFill>
+                  <a:srgbClr val="141414"/>
+                </a:solidFill>
+                <a:latin typeface="Calibri"/>
               </a:defRPr>
             </a:pPr>
             <a:r>
-              <a:t>SMART INDIA HACKATHON 2026</a:t>
+              <a:t>numenors</a:t>
             </a:r>
           </a:p>
         </p:txBody>
@@ -5973,8 +4608,8 @@
         </p:nvSpPr>
         <p:spPr>
           <a:xfrm>
-            <a:off x="11430000" y="6492240"/>
-            <a:ext cx="548640" cy="365760"/>
+            <a:off x="1693333" y="211666"/>
+            <a:ext cx="7958666" cy="592666"/>
           </a:xfrm>
           <a:prstGeom prst="rect">
             <a:avLst/>
@@ -5987,544 +4622,68 @@
           </a:bodyPr>
           <a:lstStyle/>
           <a:p>
-            <a:pPr algn="r">
-              <a:defRPr sz="1000" b="1">
-                <a:solidFill>
-                  <a:srgbClr val="FFFFFF"/>
-                </a:solidFill>
-                <a:latin typeface="Arial"/>
-              </a:defRPr>
-            </a:pPr>
-            <a:r>
-              <a:t>4</a:t>
-            </a:r>
-          </a:p>
-        </p:txBody>
-      </p:sp>
-      <p:sp>
-        <p:nvSpPr>
-          <p:cNvPr id="8" name="Rounded Rectangle 7"/>
-          <p:cNvSpPr/>
-          <p:nvPr/>
-        </p:nvSpPr>
-        <p:spPr>
-          <a:xfrm>
-            <a:off x="731520" y="1280160"/>
-            <a:ext cx="3383280" cy="2377440"/>
-          </a:xfrm>
-          <a:prstGeom prst="roundRect">
-            <a:avLst/>
-          </a:prstGeom>
-          <a:solidFill>
-            <a:srgbClr val="FFFFFF"/>
-          </a:solidFill>
-          <a:ln w="19050">
-            <a:solidFill>
-              <a:srgbClr val="1B56AC"/>
-            </a:solidFill>
-          </a:ln>
-        </p:spPr>
-        <p:style>
-          <a:lnRef idx="1">
-            <a:schemeClr val="accent1"/>
-          </a:lnRef>
-          <a:fillRef idx="3">
-            <a:schemeClr val="accent1"/>
-          </a:fillRef>
-          <a:effectRef idx="2">
-            <a:schemeClr val="accent1"/>
-          </a:effectRef>
-          <a:fontRef idx="minor">
-            <a:schemeClr val="lt1"/>
-          </a:fontRef>
-        </p:style>
-        <p:txBody>
-          <a:bodyPr rtlCol="0" anchor="ctr" wrap="square" tIns="73152"/>
-          <a:lstStyle/>
-          <a:p>
             <a:pPr algn="ctr">
-              <a:spcAft>
-                <a:spcPts val="600"/>
-              </a:spcAft>
-              <a:defRPr sz="1300" b="1">
-                <a:solidFill>
-                  <a:srgbClr val="1B56AC"/>
+              <a:defRPr sz="3600" b="1">
+                <a:solidFill>
+                  <a:srgbClr val="0F172A"/>
                 </a:solidFill>
                 <a:latin typeface="Georgia"/>
               </a:defRPr>
             </a:pPr>
             <a:r>
-              <a:t>Feasibility</a:t>
-            </a:r>
-          </a:p>
-          <a:p>
-            <a:pPr>
-              <a:spcAft>
-                <a:spcPts val="300"/>
-              </a:spcAft>
-              <a:defRPr sz="950">
-                <a:solidFill>
-                  <a:srgbClr val="191E24"/>
-                </a:solidFill>
-                <a:latin typeface="Arial"/>
-              </a:defRPr>
-            </a:pPr>
-            <a:r>
-              <a:t>- Working prototype integrates 8 scan schedulers, full RF simulation, and live tactical HUD.</a:t>
-            </a:r>
-          </a:p>
-          <a:p>
-            <a:pPr>
-              <a:spcAft>
-                <a:spcPts val="300"/>
-              </a:spcAft>
-              <a:defRPr sz="950">
-                <a:solidFill>
-                  <a:srgbClr val="191E24"/>
-                </a:solidFill>
-                <a:latin typeface="Arial"/>
-              </a:defRPr>
-            </a:pPr>
-            <a:r>
-              <a:t>- Validated on 1,000 dwell steps x 5 Monte Carlo runs with empirical DRDO validation tables.</a:t>
-            </a:r>
-          </a:p>
-          <a:p>
-            <a:pPr>
-              <a:spcAft>
-                <a:spcPts val="300"/>
-              </a:spcAft>
-              <a:defRPr sz="950">
-                <a:solidFill>
-                  <a:srgbClr val="191E24"/>
-                </a:solidFill>
-                <a:latin typeface="Arial"/>
-              </a:defRPr>
-            </a:pPr>
-            <a:r>
-              <a:t>- DQN converged to 97.3% sustained hit rate across 100 training episodes.</a:t>
-            </a:r>
-          </a:p>
-          <a:p>
-            <a:pPr>
-              <a:spcAft>
-                <a:spcPts val="300"/>
-              </a:spcAft>
-              <a:defRPr sz="950">
-                <a:solidFill>
-                  <a:srgbClr val="191E24"/>
-                </a:solidFill>
-                <a:latin typeface="Arial"/>
-              </a:defRPr>
-            </a:pPr>
-            <a:r>
-              <a:t>- Compatible with Alan Turing Institute synthetic radar dataset and JC Wise PDW schemas.</a:t>
-            </a:r>
-          </a:p>
-        </p:txBody>
-      </p:sp>
-      <p:sp>
-        <p:nvSpPr>
-          <p:cNvPr id="9" name="Rounded Rectangle 8"/>
-          <p:cNvSpPr/>
+              <a:t>FEASIBILITY AND VIABILITY</a:t>
+            </a:r>
+          </a:p>
+        </p:txBody>
+      </p:sp>
+      <p:pic>
+        <p:nvPicPr>
+          <p:cNvPr id="8" name="Picture 7" descr="s4_feasibility.png"/>
+          <p:cNvPicPr>
+            <a:picLocks noChangeAspect="1"/>
+          </p:cNvPicPr>
           <p:nvPr/>
-        </p:nvSpPr>
-        <p:spPr>
-          <a:xfrm>
-            <a:off x="4389120" y="1280160"/>
-            <a:ext cx="3383280" cy="2377440"/>
-          </a:xfrm>
-          <a:prstGeom prst="roundRect">
+        </p:nvPicPr>
+        <p:blipFill>
+          <a:blip r:embed="rId3"/>
+          <a:stretch>
+            <a:fillRect/>
+          </a:stretch>
+        </p:blipFill>
+        <p:spPr>
+          <a:xfrm>
+            <a:off x="1989666" y="846666"/>
+            <a:ext cx="8212666" cy="2370666"/>
+          </a:xfrm>
+          <a:prstGeom prst="rect">
             <a:avLst/>
           </a:prstGeom>
-          <a:solidFill>
-            <a:srgbClr val="FFFFFF"/>
-          </a:solidFill>
-          <a:ln w="12700">
-            <a:solidFill>
-              <a:srgbClr val="D7E1EB"/>
-            </a:solidFill>
-          </a:ln>
-        </p:spPr>
-        <p:style>
-          <a:lnRef idx="1">
-            <a:schemeClr val="accent1"/>
-          </a:lnRef>
-          <a:fillRef idx="3">
-            <a:schemeClr val="accent1"/>
-          </a:fillRef>
-          <a:effectRef idx="2">
-            <a:schemeClr val="accent1"/>
-          </a:effectRef>
-          <a:fontRef idx="minor">
-            <a:schemeClr val="lt1"/>
-          </a:fontRef>
-        </p:style>
-        <p:txBody>
-          <a:bodyPr rtlCol="0" anchor="ctr" wrap="square" tIns="73152"/>
-          <a:lstStyle/>
-          <a:p>
-            <a:pPr algn="ctr">
-              <a:spcAft>
-                <a:spcPts val="600"/>
-              </a:spcAft>
-              <a:defRPr sz="1300" b="1">
-                <a:solidFill>
-                  <a:srgbClr val="1B56AC"/>
-                </a:solidFill>
-                <a:latin typeface="Georgia"/>
-              </a:defRPr>
-            </a:pPr>
-            <a:r>
-              <a:t>Viability</a:t>
-            </a:r>
-          </a:p>
-          <a:p>
-            <a:pPr>
-              <a:spcAft>
-                <a:spcPts val="300"/>
-              </a:spcAft>
-              <a:defRPr sz="950">
-                <a:solidFill>
-                  <a:srgbClr val="191E24"/>
-                </a:solidFill>
-                <a:latin typeface="Arial"/>
-              </a:defRPr>
-            </a:pPr>
-            <a:r>
-              <a:t>- Closed-loop cognitive scheduling delivers +217% higher reward and &gt;2x intercept rate.</a:t>
-            </a:r>
-          </a:p>
-          <a:p>
-            <a:pPr>
-              <a:spcAft>
-                <a:spcPts val="300"/>
-              </a:spcAft>
-              <a:defRPr sz="950">
-                <a:solidFill>
-                  <a:srgbClr val="191E24"/>
-                </a:solidFill>
-                <a:latin typeface="Arial"/>
-              </a:defRPr>
-            </a:pPr>
-            <a:r>
-              <a:t>- Eliminates reliance on pre-mission intelligence through online hit/miss adaptation.</a:t>
-            </a:r>
-          </a:p>
-          <a:p>
-            <a:pPr>
-              <a:spcAft>
-                <a:spcPts val="300"/>
-              </a:spcAft>
-              <a:defRPr sz="950">
-                <a:solidFill>
-                  <a:srgbClr val="191E24"/>
-                </a:solidFill>
-                <a:latin typeface="Arial"/>
-              </a:defRPr>
-            </a:pPr>
-            <a:r>
-              <a:t>- Modular architecture enables seamless deployment to SDRs (HackRF, USRP, DRDO ES receivers).</a:t>
-            </a:r>
-          </a:p>
-          <a:p>
-            <a:pPr>
-              <a:spcAft>
-                <a:spcPts val="300"/>
-              </a:spcAft>
-              <a:defRPr sz="950">
-                <a:solidFill>
-                  <a:srgbClr val="191E24"/>
-                </a:solidFill>
-                <a:latin typeface="Arial"/>
-              </a:defRPr>
-            </a:pPr>
-            <a:r>
-              <a:t>- Operates within real-time millisecond computational latency budgets.</a:t>
-            </a:r>
-          </a:p>
-        </p:txBody>
-      </p:sp>
-      <p:sp>
-        <p:nvSpPr>
-          <p:cNvPr id="10" name="Rounded Rectangle 9"/>
-          <p:cNvSpPr/>
+        </p:spPr>
+      </p:pic>
+      <p:pic>
+        <p:nvPicPr>
+          <p:cNvPr id="9" name="Picture 8" descr="s4_challenges.png"/>
+          <p:cNvPicPr>
+            <a:picLocks noChangeAspect="1"/>
+          </p:cNvPicPr>
           <p:nvPr/>
-        </p:nvSpPr>
-        <p:spPr>
-          <a:xfrm>
-            <a:off x="8046720" y="1280160"/>
-            <a:ext cx="3383280" cy="2377440"/>
-          </a:xfrm>
-          <a:prstGeom prst="roundRect">
+        </p:nvPicPr>
+        <p:blipFill>
+          <a:blip r:embed="rId4"/>
+          <a:stretch>
+            <a:fillRect/>
+          </a:stretch>
+        </p:blipFill>
+        <p:spPr>
+          <a:xfrm>
+            <a:off x="1185333" y="3302000"/>
+            <a:ext cx="9821333" cy="2878666"/>
+          </a:xfrm>
+          <a:prstGeom prst="rect">
             <a:avLst/>
           </a:prstGeom>
-          <a:solidFill>
-            <a:srgbClr val="FFFFFF"/>
-          </a:solidFill>
-          <a:ln w="12700">
-            <a:solidFill>
-              <a:srgbClr val="D7E1EB"/>
-            </a:solidFill>
-          </a:ln>
-        </p:spPr>
-        <p:style>
-          <a:lnRef idx="1">
-            <a:schemeClr val="accent1"/>
-          </a:lnRef>
-          <a:fillRef idx="3">
-            <a:schemeClr val="accent1"/>
-          </a:fillRef>
-          <a:effectRef idx="2">
-            <a:schemeClr val="accent1"/>
-          </a:effectRef>
-          <a:fontRef idx="minor">
-            <a:schemeClr val="lt1"/>
-          </a:fontRef>
-        </p:style>
-        <p:txBody>
-          <a:bodyPr rtlCol="0" anchor="ctr" wrap="square" tIns="73152"/>
-          <a:lstStyle/>
-          <a:p>
-            <a:pPr algn="ctr">
-              <a:spcAft>
-                <a:spcPts val="600"/>
-              </a:spcAft>
-              <a:defRPr sz="1300" b="1">
-                <a:solidFill>
-                  <a:srgbClr val="1B56AC"/>
-                </a:solidFill>
-                <a:latin typeface="Georgia"/>
-              </a:defRPr>
-            </a:pPr>
-            <a:r>
-              <a:t>Practical Implementation</a:t>
-            </a:r>
-          </a:p>
-          <a:p>
-            <a:pPr>
-              <a:spcAft>
-                <a:spcPts val="300"/>
-              </a:spcAft>
-              <a:defRPr sz="950">
-                <a:solidFill>
-                  <a:srgbClr val="191E24"/>
-                </a:solidFill>
-                <a:latin typeface="Arial"/>
-              </a:defRPr>
-            </a:pPr>
-            <a:r>
-              <a:t>- Deployable as simulation-backed tactical C2 decision tool for ESM operators.</a:t>
-            </a:r>
-          </a:p>
-          <a:p>
-            <a:pPr>
-              <a:spcAft>
-                <a:spcPts val="300"/>
-              </a:spcAft>
-              <a:defRPr sz="950">
-                <a:solidFill>
-                  <a:srgbClr val="191E24"/>
-                </a:solidFill>
-                <a:latin typeface="Arial"/>
-              </a:defRPr>
-            </a:pPr>
-            <a:r>
-              <a:t>- Integrated WebSocket server streams live telemetry to standard web browsers at 20Hz.</a:t>
-            </a:r>
-          </a:p>
-          <a:p>
-            <a:pPr>
-              <a:spcAft>
-                <a:spcPts val="300"/>
-              </a:spcAft>
-              <a:defRPr sz="950">
-                <a:solidFill>
-                  <a:srgbClr val="191E24"/>
-                </a:solidFill>
-                <a:latin typeface="Arial"/>
-              </a:defRPr>
-            </a:pPr>
-            <a:r>
-              <a:t>- Includes official Hugging Face .h5 dataset downloader (cli.py fetch-hf) for field data ingestion.</a:t>
-            </a:r>
-          </a:p>
-          <a:p>
-            <a:pPr>
-              <a:spcAft>
-                <a:spcPts val="300"/>
-              </a:spcAft>
-              <a:defRPr sz="950">
-                <a:solidFill>
-                  <a:srgbClr val="191E24"/>
-                </a:solidFill>
-                <a:latin typeface="Arial"/>
-              </a:defRPr>
-            </a:pPr>
-            <a:r>
-              <a:t>- Ready for hardware-in-the-loop (HIL) RF receiver integration and flight testing.</a:t>
-            </a:r>
-          </a:p>
-        </p:txBody>
-      </p:sp>
-      <p:sp>
-        <p:nvSpPr>
-          <p:cNvPr id="11" name="Rounded Rectangle 10"/>
-          <p:cNvSpPr/>
-          <p:nvPr/>
-        </p:nvSpPr>
-        <p:spPr>
-          <a:xfrm>
-            <a:off x="731520" y="3840480"/>
-            <a:ext cx="10698480" cy="2377440"/>
-          </a:xfrm>
-          <a:prstGeom prst="roundRect">
-            <a:avLst/>
-          </a:prstGeom>
-          <a:solidFill>
-            <a:srgbClr val="FFFFFF"/>
-          </a:solidFill>
-          <a:ln w="12700">
-            <a:solidFill>
-              <a:srgbClr val="D7E1EB"/>
-            </a:solidFill>
-          </a:ln>
-        </p:spPr>
-        <p:style>
-          <a:lnRef idx="1">
-            <a:schemeClr val="accent1"/>
-          </a:lnRef>
-          <a:fillRef idx="3">
-            <a:schemeClr val="accent1"/>
-          </a:fillRef>
-          <a:effectRef idx="2">
-            <a:schemeClr val="accent1"/>
-          </a:effectRef>
-          <a:fontRef idx="minor">
-            <a:schemeClr val="lt1"/>
-          </a:fontRef>
-        </p:style>
-        <p:txBody>
-          <a:bodyPr rtlCol="0" anchor="ctr" wrap="square"/>
-          <a:lstStyle/>
-          <a:p>
-            <a:pPr algn="ctr">
-              <a:spcAft>
-                <a:spcPts val="600"/>
-              </a:spcAft>
-              <a:defRPr sz="1200" b="1">
-                <a:solidFill>
-                  <a:srgbClr val="102C57"/>
-                </a:solidFill>
-                <a:latin typeface="Georgia"/>
-              </a:defRPr>
-            </a:pPr>
-            <a:r>
-              <a:t>POTENTIAL CHALLENGES &amp; MITIGATION STRATEGIES</a:t>
-            </a:r>
-          </a:p>
-          <a:p>
-            <a:r>
-              <a:rPr sz="950" b="1">
-                <a:solidFill>
-                  <a:srgbClr val="191E24"/>
-                </a:solidFill>
-                <a:latin typeface="Arial"/>
-              </a:rPr>
-              <a:t>- 1. Non-Stationary Hopping Emitters: </a:t>
-            </a:r>
-            <a:r>
-              <a:rPr sz="950">
-                <a:solidFill>
-                  <a:srgbClr val="505F6E"/>
-                </a:solidFill>
-                <a:latin typeface="Arial"/>
-              </a:rPr>
-              <a:t>Evasive radars rapidly change carrier frequency. -&gt; Solution: Discounted UCB (gamma=0.90) &amp; EXP3 exponentially discount stale data to detect new hops.</a:t>
-            </a:r>
-          </a:p>
-          <a:p>
-            <a:r>
-              <a:rPr sz="950" b="1">
-                <a:solidFill>
-                  <a:srgbClr val="191E24"/>
-                </a:solidFill>
-                <a:latin typeface="Arial"/>
-              </a:rPr>
-              <a:t>- 2. Stroboscopic Harmonic Blind Spots: </a:t>
-            </a:r>
-            <a:r>
-              <a:rPr sz="950">
-                <a:solidFill>
-                  <a:srgbClr val="505F6E"/>
-                </a:solidFill>
-                <a:latin typeface="Arial"/>
-              </a:rPr>
-              <a:t>Fixed sweep periods match radar scan multiples. -&gt; Solution: Prime-staggered co-prime scan sequences break phase synchronization, guaranteeing intercept.</a:t>
-            </a:r>
-          </a:p>
-          <a:p>
-            <a:r>
-              <a:rPr sz="950" b="1">
-                <a:solidFill>
-                  <a:srgbClr val="191E24"/>
-                </a:solidFill>
-                <a:latin typeface="Arial"/>
-              </a:rPr>
-              <a:t>- 3. Receiver Synthesizer Switching Overhead: </a:t>
-            </a:r>
-            <a:r>
-              <a:rPr sz="950">
-                <a:solidFill>
-                  <a:srgbClr val="505F6E"/>
-                </a:solidFill>
-                <a:latin typeface="Arial"/>
-              </a:rPr>
-              <a:t>Frequent band hopping wastes tuning time. -&gt; Solution: Composite reward function explicitly penalizes unnecessary band switching (C_switch penalty).</a:t>
-            </a:r>
-          </a:p>
-          <a:p>
-            <a:r>
-              <a:rPr sz="950" b="1">
-                <a:solidFill>
-                  <a:srgbClr val="191E24"/>
-                </a:solidFill>
-                <a:latin typeface="Arial"/>
-              </a:rPr>
-              <a:t>- 4. Dense Spectrum Multi-Target Overlap: </a:t>
-            </a:r>
-            <a:r>
-              <a:rPr sz="950">
-                <a:solidFill>
-                  <a:srgbClr val="505F6E"/>
-                </a:solidFill>
-                <a:latin typeface="Arial"/>
-              </a:rPr>
-              <a:t>Multiple hostile radars illuminate simultaneously. -&gt; Solution: Deep Q-Network dynamically weights dwells by hostile threat priority (1 to 5 level hierarchy).</a:t>
-            </a:r>
-          </a:p>
-          <a:p>
-            <a:r>
-              <a:rPr sz="950" b="1">
-                <a:solidFill>
-                  <a:srgbClr val="191E24"/>
-                </a:solidFill>
-                <a:latin typeface="Arial"/>
-              </a:rPr>
-              <a:t>- 5. Real-World Gated Dataset Access: </a:t>
-            </a:r>
-            <a:r>
-              <a:rPr sz="950">
-                <a:solidFill>
-                  <a:srgbClr val="505F6E"/>
-                </a:solidFill>
-                <a:latin typeface="Arial"/>
-              </a:rPr>
-              <a:t>Official Turing dataset is gated on Hugging Face. -&gt; Solution: Built custom HF token authenticated loader (cli.py fetch-hf) and local fallback PDW generator.</a:t>
-            </a:r>
-          </a:p>
-        </p:txBody>
-      </p:sp>
+        </p:spPr>
+      </p:pic>
     </p:spTree>
   </p:cSld>
   <p:clrMapOvr>
@@ -6543,99 +4702,49 @@
         <p:nvPr/>
       </p:nvGrpSpPr>
       <p:grpSpPr/>
-      <p:sp>
-        <p:nvSpPr>
-          <p:cNvPr id="2" name="TextBox 1"/>
-          <p:cNvSpPr txBox="1"/>
+      <p:pic>
+        <p:nvPicPr>
+          <p:cNvPr id="2" name="Picture 1" descr="sih_logo_clean.png"/>
+          <p:cNvPicPr>
+            <a:picLocks noChangeAspect="1"/>
+          </p:cNvPicPr>
           <p:nvPr/>
-        </p:nvSpPr>
-        <p:spPr>
-          <a:xfrm>
-            <a:off x="731520" y="228600"/>
-            <a:ext cx="7315200" cy="365760"/>
+        </p:nvPicPr>
+        <p:blipFill>
+          <a:blip r:embed="rId2"/>
+          <a:stretch>
+            <a:fillRect/>
+          </a:stretch>
+        </p:blipFill>
+        <p:spPr>
+          <a:xfrm>
+            <a:off x="9821333" y="127000"/>
+            <a:ext cx="2116666" cy="914400"/>
           </a:xfrm>
           <a:prstGeom prst="rect">
             <a:avLst/>
           </a:prstGeom>
-          <a:noFill/>
-        </p:spPr>
-        <p:txBody>
-          <a:bodyPr wrap="square">
-            <a:spAutoFit/>
-          </a:bodyPr>
-          <a:lstStyle/>
-          <a:p>
-            <a:pPr>
-              <a:defRPr sz="1400" b="1">
-                <a:solidFill>
-                  <a:srgbClr val="102C57"/>
-                </a:solidFill>
-                <a:latin typeface="Georgia"/>
-              </a:defRPr>
-            </a:pPr>
-            <a:r>
-              <a:t>SMART INDIA HACKATHON 2026</a:t>
-            </a:r>
-          </a:p>
-        </p:txBody>
-      </p:sp>
-      <p:sp>
-        <p:nvSpPr>
-          <p:cNvPr id="3" name="TextBox 2"/>
-          <p:cNvSpPr txBox="1"/>
+        </p:spPr>
+      </p:pic>
+      <p:sp>
+        <p:nvSpPr>
+          <p:cNvPr id="3" name="Rectangle 2"/>
+          <p:cNvSpPr/>
           <p:nvPr/>
         </p:nvSpPr>
         <p:spPr>
           <a:xfrm>
-            <a:off x="9601200" y="182880"/>
-            <a:ext cx="2011680" cy="457200"/>
+            <a:off x="0" y="6299200"/>
+            <a:ext cx="12192000" cy="558800"/>
           </a:xfrm>
           <a:prstGeom prst="rect">
             <a:avLst/>
           </a:prstGeom>
-          <a:noFill/>
-        </p:spPr>
-        <p:txBody>
-          <a:bodyPr wrap="none">
-            <a:spAutoFit/>
-          </a:bodyPr>
-          <a:lstStyle/>
-          <a:p>
-            <a:pPr algn="r">
-              <a:defRPr sz="1100" b="1">
-                <a:solidFill>
-                  <a:srgbClr val="1B56AC"/>
-                </a:solidFill>
-                <a:latin typeface="Arial"/>
-              </a:defRPr>
-            </a:pPr>
-            <a:r>
-              <a:t>SIH 2026 // DRDO</a:t>
-            </a:r>
-          </a:p>
-        </p:txBody>
-      </p:sp>
-      <p:sp>
-        <p:nvSpPr>
-          <p:cNvPr id="4" name="Rounded Rectangle 3"/>
-          <p:cNvSpPr/>
-          <p:nvPr/>
-        </p:nvSpPr>
-        <p:spPr>
-          <a:xfrm>
-            <a:off x="731520" y="640080"/>
-            <a:ext cx="1371600" cy="320040"/>
-          </a:xfrm>
-          <a:prstGeom prst="roundRect">
-            <a:avLst/>
-          </a:prstGeom>
           <a:solidFill>
-            <a:srgbClr val="FFFFFF"/>
+            <a:srgbClr val="0B5394"/>
           </a:solidFill>
-          <a:ln w="12700">
-            <a:solidFill>
-              <a:srgbClr val="D7E1EB"/>
-            </a:solidFill>
+          <a:ln>
+            <a:noFill/>
           </a:ln>
         </p:spPr>
         <p:style>
@@ -6656,30 +4765,20 @@
           <a:bodyPr rtlCol="0" anchor="ctr"/>
           <a:lstStyle/>
           <a:p>
-            <a:pPr algn="ctr">
-              <a:defRPr sz="1100" b="1">
-                <a:solidFill>
-                  <a:srgbClr val="191E24"/>
-                </a:solidFill>
-                <a:latin typeface="Arial"/>
-              </a:defRPr>
-            </a:pPr>
-            <a:r>
-              <a:t>numenors</a:t>
-            </a:r>
-          </a:p>
-        </p:txBody>
-      </p:sp>
-      <p:sp>
-        <p:nvSpPr>
-          <p:cNvPr id="5" name="TextBox 4"/>
+            <a:pPr algn="ctr"/>
+          </a:p>
+        </p:txBody>
+      </p:sp>
+      <p:sp>
+        <p:nvSpPr>
+          <p:cNvPr id="4" name="TextBox 3"/>
           <p:cNvSpPr txBox="1"/>
           <p:nvPr/>
         </p:nvSpPr>
         <p:spPr>
           <a:xfrm>
-            <a:off x="2286000" y="548640"/>
-            <a:ext cx="7315200" cy="548640"/>
+            <a:off x="2540000" y="6316133"/>
+            <a:ext cx="7112000" cy="508000"/>
           </a:xfrm>
           <a:prstGeom prst="rect">
             <a:avLst/>
@@ -6687,44 +4786,82 @@
           <a:noFill/>
         </p:spPr>
         <p:txBody>
+          <a:bodyPr wrap="square">
+            <a:spAutoFit/>
+          </a:bodyPr>
+          <a:lstStyle/>
+          <a:p>
+            <a:pPr algn="ctr">
+              <a:defRPr sz="1700" b="1">
+                <a:solidFill>
+                  <a:srgbClr val="FFFFFF"/>
+                </a:solidFill>
+                <a:latin typeface="Georgia"/>
+              </a:defRPr>
+            </a:pPr>
+            <a:r>
+              <a:t>SMART INDIA HACKATHON 2026</a:t>
+            </a:r>
+          </a:p>
+        </p:txBody>
+      </p:sp>
+      <p:sp>
+        <p:nvSpPr>
+          <p:cNvPr id="5" name="TextBox 4"/>
+          <p:cNvSpPr txBox="1"/>
+          <p:nvPr/>
+        </p:nvSpPr>
+        <p:spPr>
+          <a:xfrm>
+            <a:off x="11176000" y="6316133"/>
+            <a:ext cx="846666" cy="508000"/>
+          </a:xfrm>
+          <a:prstGeom prst="rect">
+            <a:avLst/>
+          </a:prstGeom>
+          <a:noFill/>
+        </p:spPr>
+        <p:txBody>
           <a:bodyPr wrap="none">
             <a:spAutoFit/>
           </a:bodyPr>
           <a:lstStyle/>
           <a:p>
-            <a:pPr>
-              <a:defRPr sz="2200" b="1">
-                <a:solidFill>
-                  <a:srgbClr val="191E24"/>
-                </a:solidFill>
-                <a:latin typeface="Georgia"/>
+            <a:pPr algn="r">
+              <a:defRPr sz="1700" b="1">
+                <a:solidFill>
+                  <a:srgbClr val="FFFFFF"/>
+                </a:solidFill>
+                <a:latin typeface="Arial"/>
               </a:defRPr>
             </a:pPr>
             <a:r>
-              <a:t>IMPACT AND BENEFITS</a:t>
-            </a:r>
-          </a:p>
-        </p:txBody>
-      </p:sp>
-      <p:sp>
-        <p:nvSpPr>
-          <p:cNvPr id="6" name="Rectangle 5"/>
+              <a:t>5</a:t>
+            </a:r>
+          </a:p>
+        </p:txBody>
+      </p:sp>
+      <p:sp>
+        <p:nvSpPr>
+          <p:cNvPr id="6" name="Oval 5"/>
           <p:cNvSpPr/>
           <p:nvPr/>
         </p:nvSpPr>
         <p:spPr>
           <a:xfrm>
-            <a:off x="0" y="6492240"/>
-            <a:ext cx="12191695" cy="365760"/>
-          </a:xfrm>
-          <a:prstGeom prst="rect">
+            <a:off x="270933" y="237066"/>
+            <a:ext cx="1439333" cy="660400"/>
+          </a:xfrm>
+          <a:prstGeom prst="ellipse">
             <a:avLst/>
           </a:prstGeom>
           <a:solidFill>
-            <a:srgbClr val="102C57"/>
+            <a:srgbClr val="FFFFFF"/>
           </a:solidFill>
-          <a:ln>
-            <a:noFill/>
+          <a:ln w="31750">
+            <a:solidFill>
+              <a:srgbClr val="5E35B1"/>
+            </a:solidFill>
           </a:ln>
         </p:spPr>
         <p:style>
@@ -6742,19 +4879,19 @@
           </a:fontRef>
         </p:style>
         <p:txBody>
-          <a:bodyPr rtlCol="0" anchor="ctr"/>
+          <a:bodyPr rtlCol="0" anchor="ctr" wrap="none" lIns="0" rIns="0" tIns="0" bIns="0"/>
           <a:lstStyle/>
           <a:p>
             <a:pPr algn="ctr">
-              <a:defRPr sz="1000">
-                <a:solidFill>
-                  <a:srgbClr val="FFFFFF"/>
-                </a:solidFill>
-                <a:latin typeface="Arial"/>
+              <a:defRPr sz="2100" b="1">
+                <a:solidFill>
+                  <a:srgbClr val="141414"/>
+                </a:solidFill>
+                <a:latin typeface="Calibri"/>
               </a:defRPr>
             </a:pPr>
             <a:r>
-              <a:t>SMART INDIA HACKATHON 2026</a:t>
+              <a:t>numenors</a:t>
             </a:r>
           </a:p>
         </p:txBody>
@@ -6767,8 +4904,8 @@
         </p:nvSpPr>
         <p:spPr>
           <a:xfrm>
-            <a:off x="11430000" y="6492240"/>
-            <a:ext cx="548640" cy="365760"/>
+            <a:off x="1693333" y="211666"/>
+            <a:ext cx="7958666" cy="592666"/>
           </a:xfrm>
           <a:prstGeom prst="rect">
             <a:avLst/>
@@ -6781,373 +4918,92 @@
           </a:bodyPr>
           <a:lstStyle/>
           <a:p>
-            <a:pPr algn="r">
-              <a:defRPr sz="1000" b="1">
-                <a:solidFill>
-                  <a:srgbClr val="FFFFFF"/>
-                </a:solidFill>
-                <a:latin typeface="Arial"/>
-              </a:defRPr>
-            </a:pPr>
-            <a:r>
-              <a:t>5</a:t>
-            </a:r>
-          </a:p>
-        </p:txBody>
-      </p:sp>
-      <p:sp>
-        <p:nvSpPr>
-          <p:cNvPr id="8" name="Rounded Rectangle 7"/>
-          <p:cNvSpPr/>
-          <p:nvPr/>
-        </p:nvSpPr>
-        <p:spPr>
-          <a:xfrm>
-            <a:off x="731520" y="1280160"/>
-            <a:ext cx="5486400" cy="4297680"/>
-          </a:xfrm>
-          <a:prstGeom prst="roundRect">
-            <a:avLst/>
-          </a:prstGeom>
-          <a:solidFill>
-            <a:srgbClr val="FFFFFF"/>
-          </a:solidFill>
-          <a:ln w="12700">
-            <a:solidFill>
-              <a:srgbClr val="D7E1EB"/>
-            </a:solidFill>
-          </a:ln>
-        </p:spPr>
-        <p:style>
-          <a:lnRef idx="1">
-            <a:schemeClr val="accent1"/>
-          </a:lnRef>
-          <a:fillRef idx="3">
-            <a:schemeClr val="accent1"/>
-          </a:fillRef>
-          <a:effectRef idx="2">
-            <a:schemeClr val="accent1"/>
-          </a:effectRef>
-          <a:fontRef idx="minor">
-            <a:schemeClr val="lt1"/>
-          </a:fontRef>
-        </p:style>
-        <p:txBody>
-          <a:bodyPr rtlCol="0" anchor="ctr" wrap="square"/>
-          <a:lstStyle/>
-          <a:p>
             <a:pPr algn="ctr">
-              <a:spcAft>
-                <a:spcPts val="1000"/>
-              </a:spcAft>
-              <a:defRPr sz="1300" b="1">
-                <a:solidFill>
-                  <a:srgbClr val="102C57"/>
+              <a:defRPr sz="3600" b="1">
+                <a:solidFill>
+                  <a:srgbClr val="0F172A"/>
                 </a:solidFill>
                 <a:latin typeface="Georgia"/>
               </a:defRPr>
             </a:pPr>
             <a:r>
-              <a:t>POTENTIAL IMPACT ON STAKEHOLDERS</a:t>
-            </a:r>
-          </a:p>
-          <a:p>
-            <a:pPr>
-              <a:spcAft>
-                <a:spcPts val="800"/>
-              </a:spcAft>
-            </a:pPr>
-            <a:r>
-              <a:rPr sz="1100" b="1">
-                <a:solidFill>
-                  <a:srgbClr val="1B56AC"/>
-                </a:solidFill>
-                <a:latin typeface="Arial"/>
-              </a:rPr>
-              <a:t>- Electronic Support (ESM) Operators:
-  </a:t>
-            </a:r>
-            <a:r>
-              <a:rPr sz="1000">
-                <a:solidFill>
-                  <a:srgbClr val="191E24"/>
-                </a:solidFill>
-                <a:latin typeface="Arial"/>
-              </a:rPr>
-              <a:t>Receive live 360 AoA target tracking, predicted beam illumination warnings, and zero-latency threat alerts without manually tuning receivers.</a:t>
-            </a:r>
-          </a:p>
-          <a:p>
-            <a:pPr>
-              <a:spcAft>
-                <a:spcPts val="800"/>
-              </a:spcAft>
-            </a:pPr>
-            <a:r>
-              <a:rPr sz="1100" b="1">
-                <a:solidFill>
-                  <a:srgbClr val="1B56AC"/>
-                </a:solidFill>
-                <a:latin typeface="Arial"/>
-              </a:rPr>
-              <a:t>- Mission Commanders &amp; Air Defence:
-  </a:t>
-            </a:r>
-            <a:r>
-              <a:rPr sz="1000">
-                <a:solidFill>
-                  <a:srgbClr val="191E24"/>
-                </a:solidFill>
-                <a:latin typeface="Arial"/>
-              </a:rPr>
-              <a:t>Gain early warning against hostile surveillance and fire-control radars, improving survivability and mission success rates for fighter/UAV fleets.</a:t>
-            </a:r>
-          </a:p>
-          <a:p>
-            <a:pPr>
-              <a:spcAft>
-                <a:spcPts val="800"/>
-              </a:spcAft>
-            </a:pPr>
-            <a:r>
-              <a:rPr sz="1100" b="1">
-                <a:solidFill>
-                  <a:srgbClr val="1B56AC"/>
-                </a:solidFill>
-                <a:latin typeface="Arial"/>
-              </a:rPr>
-              <a:t>- DRDO &amp; Defence R&amp;D Teams:
-  </a:t>
-            </a:r>
-            <a:r>
-              <a:rPr sz="1000">
-                <a:solidFill>
-                  <a:srgbClr val="191E24"/>
-                </a:solidFill>
-                <a:latin typeface="Arial"/>
-              </a:rPr>
-              <a:t>Can benchmark cognitive EW algorithms across simulated environments, Turing synthetic datasets, and SDR hardware with standardized Figures of Merit.</a:t>
-            </a:r>
-          </a:p>
-          <a:p>
-            <a:pPr>
-              <a:spcAft>
-                <a:spcPts val="800"/>
-              </a:spcAft>
-            </a:pPr>
-            <a:r>
-              <a:rPr sz="1100" b="1">
-                <a:solidFill>
-                  <a:srgbClr val="1B56AC"/>
-                </a:solidFill>
-                <a:latin typeface="Arial"/>
-              </a:rPr>
-              <a:t>- Armed Forces Fleet Readiness:
-  </a:t>
-            </a:r>
-            <a:r>
-              <a:rPr sz="1000">
-                <a:solidFill>
-                  <a:srgbClr val="191E24"/>
-                </a:solidFill>
-                <a:latin typeface="Arial"/>
-              </a:rPr>
-              <a:t>Replaces rigid pre-mission data requirements with autonomous online learning, ensuring operational superiority in contested, denied electromagnetic spectrums.</a:t>
-            </a:r>
-          </a:p>
-        </p:txBody>
-      </p:sp>
-      <p:sp>
-        <p:nvSpPr>
-          <p:cNvPr id="9" name="Rounded Rectangle 8"/>
-          <p:cNvSpPr/>
+              <a:t>IMPACT AND BENEFITS</a:t>
+            </a:r>
+          </a:p>
+        </p:txBody>
+      </p:sp>
+      <p:pic>
+        <p:nvPicPr>
+          <p:cNvPr id="8" name="Picture 7" descr="s5_stakeholders.png"/>
+          <p:cNvPicPr>
+            <a:picLocks noChangeAspect="1"/>
+          </p:cNvPicPr>
           <p:nvPr/>
-        </p:nvSpPr>
-        <p:spPr>
-          <a:xfrm>
-            <a:off x="6492240" y="1280160"/>
-            <a:ext cx="4937760" cy="4297680"/>
-          </a:xfrm>
-          <a:prstGeom prst="roundRect">
-            <a:avLst/>
-          </a:prstGeom>
-          <a:solidFill>
-            <a:srgbClr val="FFFFFF"/>
-          </a:solidFill>
-          <a:ln w="19050">
-            <a:solidFill>
-              <a:srgbClr val="1B56AC"/>
-            </a:solidFill>
-          </a:ln>
-        </p:spPr>
-        <p:style>
-          <a:lnRef idx="1">
-            <a:schemeClr val="accent1"/>
-          </a:lnRef>
-          <a:fillRef idx="3">
-            <a:schemeClr val="accent1"/>
-          </a:fillRef>
-          <a:effectRef idx="2">
-            <a:schemeClr val="accent1"/>
-          </a:effectRef>
-          <a:fontRef idx="minor">
-            <a:schemeClr val="lt1"/>
-          </a:fontRef>
-        </p:style>
-        <p:txBody>
-          <a:bodyPr rtlCol="0" anchor="ctr" wrap="square"/>
-          <a:lstStyle/>
-          <a:p>
-            <a:pPr algn="ctr">
-              <a:spcAft>
-                <a:spcPts val="1000"/>
-              </a:spcAft>
-              <a:defRPr sz="1300" b="1">
-                <a:solidFill>
-                  <a:srgbClr val="1B56AC"/>
-                </a:solidFill>
-                <a:latin typeface="Georgia"/>
-              </a:defRPr>
-            </a:pPr>
-            <a:r>
-              <a:t>BENEFITS OF THE SOLUTION</a:t>
-            </a:r>
-          </a:p>
-          <a:p>
-            <a:pPr>
-              <a:spcAft>
-                <a:spcPts val="800"/>
-              </a:spcAft>
-            </a:pPr>
-            <a:r>
-              <a:rPr sz="1100" b="1">
-                <a:solidFill>
-                  <a:srgbClr val="102C57"/>
-                </a:solidFill>
-                <a:latin typeface="Arial"/>
-              </a:rPr>
-              <a:t>[+] Mission Survivability &amp; Interception Rate
-  </a:t>
-            </a:r>
-            <a:r>
-              <a:rPr sz="1000">
-                <a:solidFill>
-                  <a:srgbClr val="505F6E"/>
-                </a:solidFill>
-                <a:latin typeface="Arial"/>
-              </a:rPr>
-              <a:t>Doubles pulse interception rate (from 16.6 to 34.7 pulses/sec) and achieves +217% higher reward by locking onto hostile threat bands before enemy lock-on occurs.</a:t>
-            </a:r>
-          </a:p>
-          <a:p>
-            <a:pPr>
-              <a:spcAft>
-                <a:spcPts val="800"/>
-              </a:spcAft>
-            </a:pPr>
-            <a:r>
-              <a:rPr sz="1100" b="1">
-                <a:solidFill>
-                  <a:srgbClr val="102C57"/>
-                </a:solidFill>
-                <a:latin typeface="Arial"/>
-              </a:rPr>
-              <a:t>[+] Sensor Hardware &amp; Spectrum Economy
-  </a:t>
-            </a:r>
-            <a:r>
-              <a:rPr sz="1000">
-                <a:solidFill>
-                  <a:srgbClr val="505F6E"/>
-                </a:solidFill>
-                <a:latin typeface="Arial"/>
-              </a:rPr>
-              <a:t>Maximizes the capability of existing narrowband receivers (IBW &lt;&lt; B_sys) without requiring expensive wideband instantaneous sensor hardware upgrades.</a:t>
-            </a:r>
-          </a:p>
-          <a:p>
-            <a:pPr>
-              <a:spcAft>
-                <a:spcPts val="800"/>
-              </a:spcAft>
-            </a:pPr>
-            <a:r>
-              <a:rPr sz="1100" b="1">
-                <a:solidFill>
-                  <a:srgbClr val="102C57"/>
-                </a:solidFill>
-                <a:latin typeface="Arial"/>
-              </a:rPr>
-              <a:t>[+] Cognitive Operational Readiness
-  </a:t>
-            </a:r>
-            <a:r>
-              <a:rPr sz="1000">
-                <a:solidFill>
-                  <a:srgbClr val="505F6E"/>
-                </a:solidFill>
-                <a:latin typeface="Arial"/>
-              </a:rPr>
-              <a:t>Autonomous online learning from hits and misses operates effectively when enemy radar operating frequencies and PRIs are completely unknown.</a:t>
-            </a:r>
-          </a:p>
-        </p:txBody>
-      </p:sp>
-      <p:sp>
-        <p:nvSpPr>
-          <p:cNvPr id="10" name="Rectangle 9"/>
-          <p:cNvSpPr/>
-          <p:nvPr/>
-        </p:nvSpPr>
-        <p:spPr>
-          <a:xfrm>
-            <a:off x="731520" y="5715000"/>
-            <a:ext cx="10698480" cy="548640"/>
+        </p:nvPicPr>
+        <p:blipFill>
+          <a:blip r:embed="rId3"/>
+          <a:stretch>
+            <a:fillRect/>
+          </a:stretch>
+        </p:blipFill>
+        <p:spPr>
+          <a:xfrm>
+            <a:off x="381000" y="973666"/>
+            <a:ext cx="6392333" cy="4614333"/>
           </a:xfrm>
           <a:prstGeom prst="rect">
             <a:avLst/>
           </a:prstGeom>
-          <a:solidFill>
-            <a:srgbClr val="EBF3FC"/>
-          </a:solidFill>
-          <a:ln w="12700">
-            <a:solidFill>
-              <a:srgbClr val="1B56AC"/>
-            </a:solidFill>
-          </a:ln>
-        </p:spPr>
-        <p:style>
-          <a:lnRef idx="1">
-            <a:schemeClr val="accent1"/>
-          </a:lnRef>
-          <a:fillRef idx="3">
-            <a:schemeClr val="accent1"/>
-          </a:fillRef>
-          <a:effectRef idx="2">
-            <a:schemeClr val="accent1"/>
-          </a:effectRef>
-          <a:fontRef idx="minor">
-            <a:schemeClr val="lt1"/>
-          </a:fontRef>
-        </p:style>
-        <p:txBody>
-          <a:bodyPr rtlCol="0" anchor="ctr"/>
-          <a:lstStyle/>
-          <a:p>
-            <a:pPr algn="ctr">
-              <a:defRPr sz="1100" i="1" b="1">
-                <a:solidFill>
-                  <a:srgbClr val="102C57"/>
-                </a:solidFill>
-                <a:latin typeface="Georgia"/>
-              </a:defRPr>
-            </a:pPr>
-            <a:r>
-              <a:t>"India's next-generation cognitive electronic warfare intelligence -- zero prior intelligence, real-time threat interception, mission-ready electronic support."</a:t>
-            </a:r>
-          </a:p>
-        </p:txBody>
-      </p:sp>
+        </p:spPr>
+      </p:pic>
+      <p:pic>
+        <p:nvPicPr>
+          <p:cNvPr id="9" name="Picture 8" descr="s5_benefits.png"/>
+          <p:cNvPicPr>
+            <a:picLocks noChangeAspect="1"/>
+          </p:cNvPicPr>
+          <p:nvPr/>
+        </p:nvPicPr>
+        <p:blipFill>
+          <a:blip r:embed="rId4"/>
+          <a:stretch>
+            <a:fillRect/>
+          </a:stretch>
+        </p:blipFill>
+        <p:spPr>
+          <a:xfrm>
+            <a:off x="6985000" y="973666"/>
+            <a:ext cx="4826000" cy="4614333"/>
+          </a:xfrm>
+          <a:prstGeom prst="rect">
+            <a:avLst/>
+          </a:prstGeom>
+        </p:spPr>
+      </p:pic>
+      <p:pic>
+        <p:nvPicPr>
+          <p:cNvPr id="10" name="Picture 9" descr="s5_banner.png"/>
+          <p:cNvPicPr>
+            <a:picLocks noChangeAspect="1"/>
+          </p:cNvPicPr>
+          <p:nvPr/>
+        </p:nvPicPr>
+        <p:blipFill>
+          <a:blip r:embed="rId5"/>
+          <a:stretch>
+            <a:fillRect/>
+          </a:stretch>
+        </p:blipFill>
+        <p:spPr>
+          <a:xfrm>
+            <a:off x="381000" y="5706533"/>
+            <a:ext cx="11430000" cy="508000"/>
+          </a:xfrm>
+          <a:prstGeom prst="rect">
+            <a:avLst/>
+          </a:prstGeom>
+        </p:spPr>
+      </p:pic>
     </p:spTree>
   </p:cSld>
   <p:clrMapOvr>
@@ -7166,99 +5022,49 @@
         <p:nvPr/>
       </p:nvGrpSpPr>
       <p:grpSpPr/>
-      <p:sp>
-        <p:nvSpPr>
-          <p:cNvPr id="2" name="TextBox 1"/>
-          <p:cNvSpPr txBox="1"/>
+      <p:pic>
+        <p:nvPicPr>
+          <p:cNvPr id="2" name="Picture 1" descr="sih_logo_clean.png"/>
+          <p:cNvPicPr>
+            <a:picLocks noChangeAspect="1"/>
+          </p:cNvPicPr>
           <p:nvPr/>
-        </p:nvSpPr>
-        <p:spPr>
-          <a:xfrm>
-            <a:off x="731520" y="228600"/>
-            <a:ext cx="7315200" cy="365760"/>
+        </p:nvPicPr>
+        <p:blipFill>
+          <a:blip r:embed="rId2"/>
+          <a:stretch>
+            <a:fillRect/>
+          </a:stretch>
+        </p:blipFill>
+        <p:spPr>
+          <a:xfrm>
+            <a:off x="9821333" y="127000"/>
+            <a:ext cx="2116666" cy="914400"/>
           </a:xfrm>
           <a:prstGeom prst="rect">
             <a:avLst/>
           </a:prstGeom>
-          <a:noFill/>
-        </p:spPr>
-        <p:txBody>
-          <a:bodyPr wrap="square">
-            <a:spAutoFit/>
-          </a:bodyPr>
-          <a:lstStyle/>
-          <a:p>
-            <a:pPr>
-              <a:defRPr sz="1400" b="1">
-                <a:solidFill>
-                  <a:srgbClr val="102C57"/>
-                </a:solidFill>
-                <a:latin typeface="Georgia"/>
-              </a:defRPr>
-            </a:pPr>
-            <a:r>
-              <a:t>SMART INDIA HACKATHON 2026</a:t>
-            </a:r>
-          </a:p>
-        </p:txBody>
-      </p:sp>
-      <p:sp>
-        <p:nvSpPr>
-          <p:cNvPr id="3" name="TextBox 2"/>
-          <p:cNvSpPr txBox="1"/>
+        </p:spPr>
+      </p:pic>
+      <p:sp>
+        <p:nvSpPr>
+          <p:cNvPr id="3" name="Rectangle 2"/>
+          <p:cNvSpPr/>
           <p:nvPr/>
         </p:nvSpPr>
         <p:spPr>
           <a:xfrm>
-            <a:off x="9601200" y="182880"/>
-            <a:ext cx="2011680" cy="457200"/>
+            <a:off x="0" y="6299200"/>
+            <a:ext cx="12192000" cy="558800"/>
           </a:xfrm>
           <a:prstGeom prst="rect">
             <a:avLst/>
           </a:prstGeom>
-          <a:noFill/>
-        </p:spPr>
-        <p:txBody>
-          <a:bodyPr wrap="none">
-            <a:spAutoFit/>
-          </a:bodyPr>
-          <a:lstStyle/>
-          <a:p>
-            <a:pPr algn="r">
-              <a:defRPr sz="1100" b="1">
-                <a:solidFill>
-                  <a:srgbClr val="1B56AC"/>
-                </a:solidFill>
-                <a:latin typeface="Arial"/>
-              </a:defRPr>
-            </a:pPr>
-            <a:r>
-              <a:t>SIH 2026 // DRDO</a:t>
-            </a:r>
-          </a:p>
-        </p:txBody>
-      </p:sp>
-      <p:sp>
-        <p:nvSpPr>
-          <p:cNvPr id="4" name="Rounded Rectangle 3"/>
-          <p:cNvSpPr/>
-          <p:nvPr/>
-        </p:nvSpPr>
-        <p:spPr>
-          <a:xfrm>
-            <a:off x="731520" y="640080"/>
-            <a:ext cx="1371600" cy="320040"/>
-          </a:xfrm>
-          <a:prstGeom prst="roundRect">
-            <a:avLst/>
-          </a:prstGeom>
           <a:solidFill>
-            <a:srgbClr val="FFFFFF"/>
+            <a:srgbClr val="0B5394"/>
           </a:solidFill>
-          <a:ln w="12700">
-            <a:solidFill>
-              <a:srgbClr val="D7E1EB"/>
-            </a:solidFill>
+          <a:ln>
+            <a:noFill/>
           </a:ln>
         </p:spPr>
         <p:style>
@@ -7279,30 +5085,20 @@
           <a:bodyPr rtlCol="0" anchor="ctr"/>
           <a:lstStyle/>
           <a:p>
-            <a:pPr algn="ctr">
-              <a:defRPr sz="1100" b="1">
-                <a:solidFill>
-                  <a:srgbClr val="191E24"/>
-                </a:solidFill>
-                <a:latin typeface="Arial"/>
-              </a:defRPr>
-            </a:pPr>
-            <a:r>
-              <a:t>numenors</a:t>
-            </a:r>
-          </a:p>
-        </p:txBody>
-      </p:sp>
-      <p:sp>
-        <p:nvSpPr>
-          <p:cNvPr id="5" name="TextBox 4"/>
+            <a:pPr algn="ctr"/>
+          </a:p>
+        </p:txBody>
+      </p:sp>
+      <p:sp>
+        <p:nvSpPr>
+          <p:cNvPr id="4" name="TextBox 3"/>
           <p:cNvSpPr txBox="1"/>
           <p:nvPr/>
         </p:nvSpPr>
         <p:spPr>
           <a:xfrm>
-            <a:off x="2286000" y="548640"/>
-            <a:ext cx="7315200" cy="548640"/>
+            <a:off x="2540000" y="6316133"/>
+            <a:ext cx="7112000" cy="508000"/>
           </a:xfrm>
           <a:prstGeom prst="rect">
             <a:avLst/>
@@ -7310,44 +5106,82 @@
           <a:noFill/>
         </p:spPr>
         <p:txBody>
+          <a:bodyPr wrap="square">
+            <a:spAutoFit/>
+          </a:bodyPr>
+          <a:lstStyle/>
+          <a:p>
+            <a:pPr algn="ctr">
+              <a:defRPr sz="1700" b="1">
+                <a:solidFill>
+                  <a:srgbClr val="FFFFFF"/>
+                </a:solidFill>
+                <a:latin typeface="Georgia"/>
+              </a:defRPr>
+            </a:pPr>
+            <a:r>
+              <a:t>SMART INDIA HACKATHON 2026</a:t>
+            </a:r>
+          </a:p>
+        </p:txBody>
+      </p:sp>
+      <p:sp>
+        <p:nvSpPr>
+          <p:cNvPr id="5" name="TextBox 4"/>
+          <p:cNvSpPr txBox="1"/>
+          <p:nvPr/>
+        </p:nvSpPr>
+        <p:spPr>
+          <a:xfrm>
+            <a:off x="11176000" y="6316133"/>
+            <a:ext cx="846666" cy="508000"/>
+          </a:xfrm>
+          <a:prstGeom prst="rect">
+            <a:avLst/>
+          </a:prstGeom>
+          <a:noFill/>
+        </p:spPr>
+        <p:txBody>
           <a:bodyPr wrap="none">
             <a:spAutoFit/>
           </a:bodyPr>
           <a:lstStyle/>
           <a:p>
-            <a:pPr>
-              <a:defRPr sz="2200" b="1">
-                <a:solidFill>
-                  <a:srgbClr val="191E24"/>
-                </a:solidFill>
-                <a:latin typeface="Georgia"/>
+            <a:pPr algn="r">
+              <a:defRPr sz="1700" b="1">
+                <a:solidFill>
+                  <a:srgbClr val="FFFFFF"/>
+                </a:solidFill>
+                <a:latin typeface="Arial"/>
               </a:defRPr>
             </a:pPr>
             <a:r>
-              <a:t>RESEARCH AND REFERENCES</a:t>
-            </a:r>
-          </a:p>
-        </p:txBody>
-      </p:sp>
-      <p:sp>
-        <p:nvSpPr>
-          <p:cNvPr id="6" name="Rectangle 5"/>
+              <a:t>6</a:t>
+            </a:r>
+          </a:p>
+        </p:txBody>
+      </p:sp>
+      <p:sp>
+        <p:nvSpPr>
+          <p:cNvPr id="6" name="Oval 5"/>
           <p:cNvSpPr/>
           <p:nvPr/>
         </p:nvSpPr>
         <p:spPr>
           <a:xfrm>
-            <a:off x="0" y="6492240"/>
-            <a:ext cx="12191695" cy="365760"/>
-          </a:xfrm>
-          <a:prstGeom prst="rect">
+            <a:off x="270933" y="237066"/>
+            <a:ext cx="1439333" cy="660400"/>
+          </a:xfrm>
+          <a:prstGeom prst="ellipse">
             <a:avLst/>
           </a:prstGeom>
           <a:solidFill>
-            <a:srgbClr val="102C57"/>
+            <a:srgbClr val="FFFFFF"/>
           </a:solidFill>
-          <a:ln>
-            <a:noFill/>
+          <a:ln w="31750">
+            <a:solidFill>
+              <a:srgbClr val="5E35B1"/>
+            </a:solidFill>
           </a:ln>
         </p:spPr>
         <p:style>
@@ -7365,19 +5199,19 @@
           </a:fontRef>
         </p:style>
         <p:txBody>
-          <a:bodyPr rtlCol="0" anchor="ctr"/>
+          <a:bodyPr rtlCol="0" anchor="ctr" wrap="none" lIns="0" rIns="0" tIns="0" bIns="0"/>
           <a:lstStyle/>
           <a:p>
             <a:pPr algn="ctr">
-              <a:defRPr sz="1000">
-                <a:solidFill>
-                  <a:srgbClr val="FFFFFF"/>
-                </a:solidFill>
-                <a:latin typeface="Arial"/>
+              <a:defRPr sz="2100" b="1">
+                <a:solidFill>
+                  <a:srgbClr val="141414"/>
+                </a:solidFill>
+                <a:latin typeface="Calibri"/>
               </a:defRPr>
             </a:pPr>
             <a:r>
-              <a:t>SMART INDIA HACKATHON 2026</a:t>
+              <a:t>numenors</a:t>
             </a:r>
           </a:p>
         </p:txBody>
@@ -7390,8 +5224,8 @@
         </p:nvSpPr>
         <p:spPr>
           <a:xfrm>
-            <a:off x="11430000" y="6492240"/>
-            <a:ext cx="548640" cy="365760"/>
+            <a:off x="1693333" y="211666"/>
+            <a:ext cx="7958666" cy="592666"/>
           </a:xfrm>
           <a:prstGeom prst="rect">
             <a:avLst/>
@@ -7404,199 +5238,183 @@
           </a:bodyPr>
           <a:lstStyle/>
           <a:p>
-            <a:pPr algn="r">
-              <a:defRPr sz="1000" b="1">
-                <a:solidFill>
-                  <a:srgbClr val="FFFFFF"/>
-                </a:solidFill>
-                <a:latin typeface="Arial"/>
+            <a:pPr algn="ctr">
+              <a:defRPr sz="3600" b="1">
+                <a:solidFill>
+                  <a:srgbClr val="0F172A"/>
+                </a:solidFill>
+                <a:latin typeface="Georgia"/>
               </a:defRPr>
             </a:pPr>
             <a:r>
-              <a:t>6</a:t>
-            </a:r>
-          </a:p>
-        </p:txBody>
-      </p:sp>
-      <p:sp>
-        <p:nvSpPr>
-          <p:cNvPr id="8" name="Rounded Rectangle 7"/>
-          <p:cNvSpPr/>
+              <a:t>RESEARCH  AND REFERENCES</a:t>
+            </a:r>
+          </a:p>
+        </p:txBody>
+      </p:sp>
+      <p:sp>
+        <p:nvSpPr>
+          <p:cNvPr id="8" name="TextBox 7"/>
+          <p:cNvSpPr txBox="1"/>
           <p:nvPr/>
         </p:nvSpPr>
         <p:spPr>
           <a:xfrm>
-            <a:off x="731520" y="1280160"/>
-            <a:ext cx="10698480" cy="4937760"/>
-          </a:xfrm>
-          <a:prstGeom prst="roundRect">
+            <a:off x="592666" y="1016000"/>
+            <a:ext cx="11006666" cy="5080000"/>
+          </a:xfrm>
+          <a:prstGeom prst="rect">
             <a:avLst/>
           </a:prstGeom>
-          <a:solidFill>
-            <a:srgbClr val="FFFFFF"/>
-          </a:solidFill>
-          <a:ln w="12700">
-            <a:solidFill>
-              <a:srgbClr val="D7E1EB"/>
-            </a:solidFill>
-          </a:ln>
-        </p:spPr>
-        <p:style>
-          <a:lnRef idx="1">
-            <a:schemeClr val="accent1"/>
-          </a:lnRef>
-          <a:fillRef idx="3">
-            <a:schemeClr val="accent1"/>
-          </a:fillRef>
-          <a:effectRef idx="2">
-            <a:schemeClr val="accent1"/>
-          </a:effectRef>
-          <a:fontRef idx="minor">
-            <a:schemeClr val="lt1"/>
-          </a:fontRef>
-        </p:style>
-        <p:txBody>
-          <a:bodyPr rtlCol="0" anchor="ctr" wrap="square"/>
-          <a:lstStyle/>
-          <a:p>
-            <a:pPr algn="ctr">
+          <a:noFill/>
+        </p:spPr>
+        <p:txBody>
+          <a:bodyPr wrap="square">
+            <a:spAutoFit/>
+          </a:bodyPr>
+          <a:lstStyle/>
+          <a:p>
+            <a:pPr>
               <a:spcAft>
                 <a:spcPts val="1000"/>
               </a:spcAft>
-              <a:defRPr sz="1400" b="1">
-                <a:solidFill>
-                  <a:srgbClr val="102C57"/>
+              <a:defRPr sz="2200" b="1">
+                <a:solidFill>
+                  <a:srgbClr val="0F172A"/>
                 </a:solidFill>
                 <a:latin typeface="Georgia"/>
               </a:defRPr>
             </a:pPr>
             <a:r>
-              <a:t>ACADEMIC &amp; DEFENCE RESEARCH REFERENCES</a:t>
+              <a:t>• Academic &amp; Defence Research Sources</a:t>
             </a:r>
           </a:p>
           <a:p>
             <a:pPr>
               <a:spcAft>
-                <a:spcPts val="600"/>
+                <a:spcPts val="200"/>
               </a:spcAft>
+              <a:defRPr sz="1400" b="1">
+                <a:solidFill>
+                  <a:srgbClr val="0F172A"/>
+                </a:solidFill>
+                <a:latin typeface="Segoe UI"/>
+              </a:defRPr>
             </a:pPr>
             <a:r>
-              <a:rPr sz="1100" b="1">
-                <a:solidFill>
-                  <a:srgbClr val="1B56AC"/>
-                </a:solidFill>
-                <a:latin typeface="Arial"/>
-              </a:rPr>
-              <a:t>- Defence Research &amp; Development Organisation (DRDO): </a:t>
-            </a:r>
-            <a:r>
-              <a:rPr sz="1050">
-                <a:solidFill>
-                  <a:srgbClr val="191E24"/>
-                </a:solidFill>
-                <a:latin typeface="Arial"/>
-              </a:rPr>
-              <a:t>Electronic Warfare Spectrum Surveillance &amp; Receiver Scheduling Problem Statement (Theme: Robotics &amp; Drones, Category: Software, 2026).</a:t>
+              <a:t>• Defence Research &amp; Development Organisation (DRDO / DLRL) – Electronic Support Measures (ESM) receiver architecture, wideband search strategies, and Figures of Merit standards.</a:t>
             </a:r>
           </a:p>
           <a:p>
             <a:pPr>
               <a:spcAft>
-                <a:spcPts val="600"/>
+                <a:spcPts val="1200"/>
               </a:spcAft>
+              <a:defRPr sz="1300">
+                <a:solidFill>
+                  <a:srgbClr val="0284C7"/>
+                </a:solidFill>
+                <a:latin typeface="Segoe UI"/>
+              </a:defRPr>
             </a:pPr>
             <a:r>
-              <a:rPr sz="1100" b="1">
-                <a:solidFill>
-                  <a:srgbClr val="1B56AC"/>
-                </a:solidFill>
-                <a:latin typeface="Arial"/>
-              </a:rPr>
-              <a:t>- Alan Turing Institute Synthetic Radar Dataset (TSRD): </a:t>
-            </a:r>
-            <a:r>
-              <a:rPr sz="1050">
-                <a:solidFill>
-                  <a:srgbClr val="191E24"/>
-                </a:solidFill>
-                <a:latin typeface="Arial"/>
-              </a:rPr>
-              <a:t>JC Wise et al., 'Turing Synthetic Radar Dataset for Radar Pulse Deinterleaving', Hugging Face (alan-turing-institute/turing-synthetic-radar-dataset, 2024).</a:t>
+              <a:t>https://www.drdo.gov.in/drdo/labs-and-establishments/defence-electronics-research-laboratory-dlrl</a:t>
             </a:r>
           </a:p>
           <a:p>
             <a:pPr>
               <a:spcAft>
-                <a:spcPts val="600"/>
+                <a:spcPts val="200"/>
               </a:spcAft>
+              <a:defRPr sz="1400" b="1">
+                <a:solidFill>
+                  <a:srgbClr val="0F172A"/>
+                </a:solidFill>
+                <a:latin typeface="Segoe UI"/>
+              </a:defRPr>
             </a:pPr>
             <a:r>
-              <a:rPr sz="1100" b="1">
-                <a:solidFill>
-                  <a:srgbClr val="1B56AC"/>
-                </a:solidFill>
-                <a:latin typeface="Arial"/>
-              </a:rPr>
-              <a:t>- Non-Stationary Multi-Armed Bandits in EW: </a:t>
-            </a:r>
-            <a:r>
-              <a:rPr sz="1050">
-                <a:solidFill>
-                  <a:srgbClr val="191E24"/>
-                </a:solidFill>
-                <a:latin typeface="Arial"/>
-              </a:rPr>
-              <a:t>A. Garivier &amp; E. Moulines, 'On Upper-Confidence Bound Policies for Non-Stationary Bandit Problems' (Discounted UCB &amp; Sliding-Window UCB).</a:t>
+              <a:t>• JC Wise (2024) – Alan Turing Institute Radar Emitter Dataset: High-fidelity synthetic radar pulse trains and agile emitter classification benchmarks.</a:t>
             </a:r>
           </a:p>
           <a:p>
             <a:pPr>
               <a:spcAft>
-                <a:spcPts val="600"/>
+                <a:spcPts val="1200"/>
               </a:spcAft>
+              <a:defRPr sz="1300">
+                <a:solidFill>
+                  <a:srgbClr val="0284C7"/>
+                </a:solidFill>
+                <a:latin typeface="Segoe UI"/>
+              </a:defRPr>
             </a:pPr>
             <a:r>
-              <a:rPr sz="1100" b="1">
-                <a:solidFill>
-                  <a:srgbClr val="1B56AC"/>
-                </a:solidFill>
-                <a:latin typeface="Arial"/>
-              </a:rPr>
-              <a:t>- Cognitive Electronic Support Measures (ESM): </a:t>
-            </a:r>
-            <a:r>
-              <a:rPr sz="1050">
-                <a:solidFill>
-                  <a:srgbClr val="191E24"/>
-                </a:solidFill>
-                <a:latin typeface="Arial"/>
-              </a:rPr>
-              <a:t>IEEE Aerospace &amp; Electronic Systems Magazine: 'Machine Learning Approaches for Cognitive Electronic Support Receiver Dwell Scheduling'.</a:t>
+              <a:t>https://huggingface.co/datasets/jcwise/radar-emitter-database</a:t>
             </a:r>
           </a:p>
           <a:p>
             <a:pPr>
               <a:spcAft>
-                <a:spcPts val="600"/>
+                <a:spcPts val="200"/>
               </a:spcAft>
+              <a:defRPr sz="1400" b="1">
+                <a:solidFill>
+                  <a:srgbClr val="0F172A"/>
+                </a:solidFill>
+                <a:latin typeface="Segoe UI"/>
+              </a:defRPr>
             </a:pPr>
             <a:r>
-              <a:rPr sz="1100" b="1">
-                <a:solidFill>
-                  <a:srgbClr val="1B56AC"/>
-                </a:solidFill>
-                <a:latin typeface="Arial"/>
-              </a:rPr>
-              <a:t>- Adversarial Spectrum Search (EXP3 Algorithm): </a:t>
-            </a:r>
-            <a:r>
-              <a:rPr sz="1050">
-                <a:solidFill>
-                  <a:srgbClr val="191E24"/>
-                </a:solidFill>
-                <a:latin typeface="Arial"/>
-              </a:rPr>
-              <a:t>P. Auer et al., 'The Nonstochastic Multiarmed Bandit Problem' -- SIAM Journal on Computing, guaranteeing sublinear regret against evasive frequency hoppers.</a:t>
+              <a:t>• P. Auer, N. Cesa-Bianchi, P. Fischer (2002) / A. Garivier &amp; E. Moulines (2011) – Non-Stationary Multi-Armed Bandits: The Discounted-UCB and EXP3 algorithms for dynamic environments.</a:t>
+            </a:r>
+          </a:p>
+          <a:p>
+            <a:pPr>
+              <a:spcAft>
+                <a:spcPts val="1200"/>
+              </a:spcAft>
+              <a:defRPr sz="1300">
+                <a:solidFill>
+                  <a:srgbClr val="0284C7"/>
+                </a:solidFill>
+                <a:latin typeface="Segoe UI"/>
+              </a:defRPr>
+            </a:pPr>
+            <a:r>
+              <a:t>https://arxiv.org/abs/0805.3415</a:t>
+            </a:r>
+          </a:p>
+          <a:p>
+            <a:pPr>
+              <a:spcAft>
+                <a:spcPts val="200"/>
+              </a:spcAft>
+              <a:defRPr sz="1400" b="1">
+                <a:solidFill>
+                  <a:srgbClr val="0F172A"/>
+                </a:solidFill>
+                <a:latin typeface="Segoe UI"/>
+              </a:defRPr>
+            </a:pPr>
+            <a:r>
+              <a:t>• V. Mnih et al. (2015) – Nature: Human-level control through deep reinforcement learning (DQN application to cognitive sensor scheduling).</a:t>
+            </a:r>
+          </a:p>
+          <a:p>
+            <a:pPr>
+              <a:spcAft>
+                <a:spcPts val="1200"/>
+              </a:spcAft>
+              <a:defRPr sz="1300">
+                <a:solidFill>
+                  <a:srgbClr val="0284C7"/>
+                </a:solidFill>
+                <a:latin typeface="Segoe UI"/>
+              </a:defRPr>
+            </a:pPr>
+            <a:r>
+              <a:t>https://www.nature.com/articles/nature14236</a:t>
             </a:r>
           </a:p>
           <a:p>
@@ -7604,76 +5422,51 @@
               <a:spcBef>
                 <a:spcPts val="1400"/>
               </a:spcBef>
+              <a:spcAft>
+                <a:spcPts val="600"/>
+              </a:spcAft>
+              <a:defRPr sz="2000" b="1">
+                <a:solidFill>
+                  <a:srgbClr val="0F172A"/>
+                </a:solidFill>
+                <a:latin typeface="Georgia"/>
+              </a:defRPr>
             </a:pPr>
             <a:r>
-              <a:rPr sz="1200" b="1">
-                <a:solidFill>
-                  <a:srgbClr val="102C57"/>
-                </a:solidFill>
-                <a:latin typeface="Georgia"/>
+              <a:t>LINKS TO PROJECT:</a:t>
+            </a:r>
+          </a:p>
+          <a:p>
+            <a:pPr>
+              <a:spcAft>
+                <a:spcPts val="400"/>
+              </a:spcAft>
+            </a:pPr>
+            <a:r>
+              <a:rPr b="1" sz="1500"/>
+              <a:t>Repository link: </a:t>
+            </a:r>
+            <a:r>
+              <a:rPr sz="1500">
+                <a:solidFill>
+                  <a:srgbClr val="0284C7"/>
+                </a:solidFill>
               </a:rPr>
-              <a:t>LINKS TO PROJECT &amp; LIVE ARTIFACTS:
-</a:t>
-            </a:r>
-          </a:p>
-          <a:p>
-            <a:r>
-              <a:rPr sz="1100" b="1">
-                <a:solidFill>
-                  <a:srgbClr val="191E24"/>
-                </a:solidFill>
-                <a:latin typeface="Arial"/>
+              <a:t>https://github.com/krishdeshpande/drdo-ew-smart-scan.git</a:t>
+            </a:r>
+          </a:p>
+          <a:p>
+            <a:r>
+              <a:rPr b="1" sz="1500"/>
+              <a:t>Live Tactical C2 Prototype: </a:t>
+            </a:r>
+            <a:r>
+              <a:rPr sz="1500">
+                <a:solidFill>
+                  <a:srgbClr val="0284C7"/>
+                </a:solidFill>
               </a:rPr>
-              <a:t>- GitHub Repository Link: </a:t>
-            </a:r>
-            <a:r>
-              <a:rPr sz="1100">
-                <a:solidFill>
-                  <a:srgbClr val="1B56AC"/>
-                </a:solidFill>
-                <a:latin typeface="Arial"/>
-              </a:rPr>
-              <a:t>https://github.com/krishdeshpande/drdo-ew-smart-scan</a:t>
-            </a:r>
-          </a:p>
-          <a:p>
-            <a:r>
-              <a:rPr sz="1100" b="1">
-                <a:solidFill>
-                  <a:srgbClr val="191E24"/>
-                </a:solidFill>
-                <a:latin typeface="Arial"/>
-              </a:rPr>
-              <a:t>- Local Working Prototype Directory: </a:t>
-            </a:r>
-            <a:r>
-              <a:rPr sz="1100">
-                <a:solidFill>
-                  <a:srgbClr val="1B56AC"/>
-                </a:solidFill>
-                <a:latin typeface="Arial"/>
-              </a:rPr>
-              <a:t>C:\Users\krish\.gemini\antigravity\scratch\drdo_ew_smart_scan</a:t>
-            </a:r>
-          </a:p>
-          <a:p>
-            <a:r>
-              <a:rPr sz="1100" b="1">
-                <a:solidFill>
-                  <a:srgbClr val="191E24"/>
-                </a:solidFill>
-                <a:latin typeface="Arial"/>
-              </a:rPr>
-              <a:t>- Interactive Tactical C2 Web Dashboard: </a:t>
-            </a:r>
-            <a:r>
-              <a:rPr sz="1100">
-                <a:solidFill>
-                  <a:srgbClr val="1B56AC"/>
-                </a:solidFill>
-                <a:latin typeface="Arial"/>
-              </a:rPr>
-              <a:t>http://localhost:8080/dashboard.html (Live 20Hz Telemetry)</a:t>
+              <a:t>http://localhost:8080/dashboard.html</a:t>
             </a:r>
           </a:p>
         </p:txBody>
